--- a/01-AI应用基础/授课PPT/W10-第7次课-让机器读懂故障报告.pptx
+++ b/01-AI应用基础/授课PPT/W10-第7次课-让机器读懂故障报告.pptx
@@ -38,6 +38,9 @@
     <p:sldId id="311" r:id="rId63"/>
     <p:sldId id="359" r:id="rId74"/>
     <p:sldId id="360" r:id="rId78"/>
+    <p:sldId id="361" r:id="rId71"/>
+    <p:sldId id="362" r:id="rId69"/>
+    <p:sldId id="363" r:id="rId67"/>
     <p:sldId id="312" r:id="rId64"/>
     <p:sldId id="314" r:id="rId66"/>
     <p:sldId id="316" r:id="rId68"/>
@@ -9275,7 +9278,7 @@
                 </a:solidFill>
                 <a:latin typeface="微软雅黑"/>
               </a:rPr>
-              <a:t>10 / 71</a:t>
+              <a:t>10 / 74</a:t>
             </a:r>
           </a:p>
         </p:txBody>
@@ -10877,7 +10880,7 @@
                 </a:solidFill>
                 <a:latin typeface="微软雅黑"/>
               </a:rPr>
-              <a:t>11 / 71</a:t>
+              <a:t>11 / 74</a:t>
             </a:r>
           </a:p>
         </p:txBody>
@@ -11732,7 +11735,7 @@
                 </a:solidFill>
                 <a:latin typeface="微软雅黑"/>
               </a:rPr>
-              <a:t>12 / 71</a:t>
+              <a:t>12 / 74</a:t>
             </a:r>
           </a:p>
         </p:txBody>
@@ -12438,7 +12441,7 @@
                 </a:solidFill>
                 <a:latin typeface="微软雅黑"/>
               </a:rPr>
-              <a:t>13 / 71</a:t>
+              <a:t>13 / 74</a:t>
             </a:r>
           </a:p>
         </p:txBody>
@@ -13144,7 +13147,7 @@
                 </a:solidFill>
                 <a:latin typeface="微软雅黑"/>
               </a:rPr>
-              <a:t>14 / 71</a:t>
+              <a:t>14 / 74</a:t>
             </a:r>
           </a:p>
         </p:txBody>
@@ -13850,7 +13853,7 @@
                 </a:solidFill>
                 <a:latin typeface="微软雅黑"/>
               </a:rPr>
-              <a:t>15 / 71</a:t>
+              <a:t>15 / 74</a:t>
             </a:r>
           </a:p>
         </p:txBody>
@@ -14336,7 +14339,7 @@
                 </a:solidFill>
                 <a:latin typeface="微软雅黑"/>
               </a:rPr>
-              <a:t>16 / 71</a:t>
+              <a:t>16 / 74</a:t>
             </a:r>
           </a:p>
         </p:txBody>
@@ -15042,7 +15045,7 @@
                 </a:solidFill>
                 <a:latin typeface="微软雅黑"/>
               </a:rPr>
-              <a:t>17 / 71</a:t>
+              <a:t>17 / 74</a:t>
             </a:r>
           </a:p>
         </p:txBody>
@@ -15516,7 +15519,7 @@
                 </a:solidFill>
                 <a:latin typeface="微软雅黑"/>
               </a:rPr>
-              <a:t>18 / 71</a:t>
+              <a:t>18 / 74</a:t>
             </a:r>
           </a:p>
         </p:txBody>
@@ -16222,7 +16225,7 @@
                 </a:solidFill>
                 <a:latin typeface="微软雅黑"/>
               </a:rPr>
-              <a:t>19 / 71</a:t>
+              <a:t>19 / 74</a:t>
             </a:r>
           </a:p>
         </p:txBody>
@@ -17950,7 +17953,7 @@
                 </a:solidFill>
                 <a:latin typeface="微软雅黑"/>
               </a:rPr>
-              <a:t>2 / 71</a:t>
+              <a:t>2 / 74</a:t>
             </a:r>
           </a:p>
         </p:txBody>
@@ -18922,7 +18925,7 @@
                 </a:solidFill>
                 <a:latin typeface="微软雅黑"/>
               </a:rPr>
-              <a:t>20 / 71</a:t>
+              <a:t>20 / 74</a:t>
             </a:r>
           </a:p>
         </p:txBody>
@@ -19777,7 +19780,7 @@
                 </a:solidFill>
                 <a:latin typeface="微软雅黑"/>
               </a:rPr>
-              <a:t>21 / 71</a:t>
+              <a:t>21 / 74</a:t>
             </a:r>
           </a:p>
         </p:txBody>
@@ -20749,7 +20752,7 @@
                 </a:solidFill>
                 <a:latin typeface="微软雅黑"/>
               </a:rPr>
-              <a:t>22 / 71</a:t>
+              <a:t>22 / 74</a:t>
             </a:r>
           </a:p>
         </p:txBody>
@@ -21889,7 +21892,7 @@
                 </a:solidFill>
                 <a:latin typeface="微软雅黑"/>
               </a:rPr>
-              <a:t>23 / 71</a:t>
+              <a:t>23 / 74</a:t>
             </a:r>
           </a:p>
         </p:txBody>
@@ -22681,7 +22684,7 @@
                 </a:solidFill>
                 <a:latin typeface="微软雅黑"/>
               </a:rPr>
-              <a:t>24 / 71</a:t>
+              <a:t>24 / 74</a:t>
             </a:r>
           </a:p>
         </p:txBody>
@@ -23473,7 +23476,7 @@
                 </a:solidFill>
                 <a:latin typeface="微软雅黑"/>
               </a:rPr>
-              <a:t>25 / 71</a:t>
+              <a:t>25 / 74</a:t>
             </a:r>
           </a:p>
         </p:txBody>
@@ -23993,7 +23996,7 @@
                 </a:solidFill>
                 <a:latin typeface="微软雅黑"/>
               </a:rPr>
-              <a:t>26 / 71</a:t>
+              <a:t>26 / 74</a:t>
             </a:r>
           </a:p>
         </p:txBody>
@@ -24437,7 +24440,7 @@
                 </a:solidFill>
                 <a:latin typeface="微软雅黑"/>
               </a:rPr>
-              <a:t>27 / 71</a:t>
+              <a:t>27 / 74</a:t>
             </a:r>
           </a:p>
         </p:txBody>
@@ -25292,7 +25295,7 @@
                 </a:solidFill>
                 <a:latin typeface="微软雅黑"/>
               </a:rPr>
-              <a:t>28 / 71</a:t>
+              <a:t>28 / 74</a:t>
             </a:r>
           </a:p>
         </p:txBody>
@@ -26658,7 +26661,7 @@
                 </a:solidFill>
                 <a:latin typeface="微软雅黑"/>
               </a:rPr>
-              <a:t>29 / 71</a:t>
+              <a:t>29 / 74</a:t>
             </a:r>
           </a:p>
         </p:txBody>
@@ -27536,7 +27539,7 @@
                 </a:solidFill>
                 <a:latin typeface="微软雅黑"/>
               </a:rPr>
-              <a:t>3 / 71</a:t>
+              <a:t>3 / 74</a:t>
             </a:r>
           </a:p>
         </p:txBody>
@@ -28328,7 +28331,7 @@
                 </a:solidFill>
                 <a:latin typeface="微软雅黑"/>
               </a:rPr>
-              <a:t>30 / 71</a:t>
+              <a:t>30 / 74</a:t>
             </a:r>
           </a:p>
         </p:txBody>
@@ -28980,7 +28983,7 @@
                 </a:solidFill>
                 <a:latin typeface="微软雅黑"/>
               </a:rPr>
-              <a:t>31 / 71</a:t>
+              <a:t>31 / 74</a:t>
             </a:r>
           </a:p>
         </p:txBody>
@@ -29219,21 +29222,10 @@
                 </a:solidFill>
                 <a:latin typeface="微软雅黑"/>
               </a:rPr>
-              <a:t>① 参考实现真实运行输出（本课工单·完成态）</a:t>
-            </a:r>
-          </a:p>
-          <a:p>
-            <a:pPr algn="l">
-              <a:lnSpc>
-                <a:spcPct val="110000"/>
-              </a:lnSpc>
-              <a:spcBef>
-                <a:spcPts val="0"/>
-              </a:spcBef>
-              <a:spcAft>
-                <a:spcPts val="0"/>
-              </a:spcAft>
-            </a:pPr>
+              <a:t>① 本次真跑实测输出（逐字取自 output/report.txt）</a:t>
+            </a:r>
+          </a:p>
+          <a:p>
             <a:r>
               <a:rPr sz="950" b="0">
                 <a:solidFill>
@@ -29241,21 +29233,10 @@
                 </a:solidFill>
                 <a:latin typeface="微软雅黑"/>
               </a:rPr>
-              <a:t>=== 工单 M4.1 故障报告文本分类 · 完成态 ===</a:t>
-            </a:r>
-          </a:p>
-          <a:p>
-            <a:pPr algn="l">
-              <a:lnSpc>
-                <a:spcPct val="110000"/>
-              </a:lnSpc>
-              <a:spcBef>
-                <a:spcPts val="0"/>
-              </a:spcBef>
-              <a:spcAft>
-                <a:spcPts val="0"/>
-              </a:spcAft>
-            </a:pPr>
+              <a:t>实测达成档位: 优(A) ｜ 终模型准确率 1.0000 ｜ 库外新文本预测 6 条(命中 5) ｜ 对比模型 4 个 ｜ 关键词覆盖 5/5 类 ｜ 易混类对: 仪表气动↔电气系统×5（预测正确时的第二选择近误计数） ｜ 调优Δacc +0.0000</a:t>
+            </a:r>
+          </a:p>
+          <a:p>
             <a:r>
               <a:rPr sz="950" b="0">
                 <a:solidFill>
@@ -29263,21 +29244,10 @@
                 </a:solidFill>
                 <a:latin typeface="微软雅黑"/>
               </a:rPr>
-              <a:t>语料: data/fault_reports.csv  225 条 · 5 类（仪表气动/传动系统/冷却系统/液压系统/电气系…</a:t>
-            </a:r>
-          </a:p>
-          <a:p>
-            <a:pPr algn="l">
-              <a:lnSpc>
-                <a:spcPct val="110000"/>
-              </a:lnSpc>
-              <a:spcBef>
-                <a:spcPts val="0"/>
-              </a:spcBef>
-              <a:spcAft>
-                <a:spcPts val="0"/>
-              </a:spcAft>
-            </a:pPr>
+              <a:t>及格(D)    规范率门槛≥60% [达标] ｜ 功能OK ｜ 准确率≥门槛 + 库外新文本实测预测命中</a:t>
+            </a:r>
+          </a:p>
+          <a:p>
             <a:r>
               <a:rPr sz="950" b="0">
                 <a:solidFill>
@@ -29285,21 +29255,10 @@
                 </a:solidFill>
                 <a:latin typeface="微软雅黑"/>
               </a:rPr>
-              <a:t>流水线: jieba分词+停用词 → TF-IDF → 线性分类器　划分 训练180/测试45</a:t>
-            </a:r>
-          </a:p>
-          <a:p>
-            <a:pPr algn="l">
-              <a:lnSpc>
-                <a:spcPct val="110000"/>
-              </a:lnSpc>
-              <a:spcBef>
-                <a:spcPts val="0"/>
-              </a:spcBef>
-              <a:spcAft>
-                <a:spcPts val="0"/>
-              </a:spcAft>
-            </a:pPr>
+              <a:t>良好(C)    规范率门槛≥70% [达标] ｜ 功能OK ｜ 准确率≥门槛 + 朴素贝叶斯/逻辑回归同切分对比完整</a:t>
+            </a:r>
+          </a:p>
+          <a:p>
             <a:r>
               <a:rPr sz="950" b="0">
                 <a:solidFill>
@@ -29307,21 +29266,10 @@
                 </a:solidFill>
                 <a:latin typeface="微软雅黑"/>
               </a:rPr>
-              <a:t>  NB(朴素贝叶斯)      accuracy=1.000   macro-F1=1.000</a:t>
-            </a:r>
-          </a:p>
-          <a:p>
-            <a:pPr algn="l">
-              <a:lnSpc>
-                <a:spcPct val="110000"/>
-              </a:lnSpc>
-              <a:spcBef>
-                <a:spcPts val="0"/>
-              </a:spcBef>
-              <a:spcAft>
-                <a:spcPts val="0"/>
-              </a:spcAft>
-            </a:pPr>
+              <a:t>优秀(B)    规范率门槛≥80% [达标] ｜ 功能OK ｜ 准确率≥门槛 + 每类 Top10 关键词表全类覆盖</a:t>
+            </a:r>
+          </a:p>
+          <a:p>
             <a:r>
               <a:rPr sz="950" b="0">
                 <a:solidFill>
@@ -29329,21 +29277,10 @@
                 </a:solidFill>
                 <a:latin typeface="微软雅黑"/>
               </a:rPr>
-              <a:t>  LR(逻辑回归)       accuracy=1.000   macro-F1=1.000</a:t>
-            </a:r>
-          </a:p>
-          <a:p>
-            <a:pPr algn="l">
-              <a:lnSpc>
-                <a:spcPct val="110000"/>
-              </a:lnSpc>
-              <a:spcBef>
-                <a:spcPts val="0"/>
-              </a:spcBef>
-              <a:spcAft>
-                <a:spcPts val="0"/>
-              </a:spcAft>
-            </a:pPr>
+              <a:t>优(A)     规范率门槛≥90% [达标] ｜ 功能OK ｜ 达 B 且：混淆矩阵实测定位最易混类对；自建词典+ngram 实测调优</a:t>
+            </a:r>
+          </a:p>
+          <a:p>
             <a:r>
               <a:rPr sz="950" b="0">
                 <a:solidFill>
@@ -29351,21 +29288,10 @@
                 </a:solidFill>
                 <a:latin typeface="微软雅黑"/>
               </a:rPr>
-              <a:t>对比结论: NB(朴素贝叶斯) macro-F1 最高（1.000）—— 短文本上线性模型已足够</a:t>
-            </a:r>
-          </a:p>
-          <a:p>
-            <a:pPr algn="l">
-              <a:lnSpc>
-                <a:spcPct val="110000"/>
-              </a:lnSpc>
-              <a:spcBef>
-                <a:spcPts val="0"/>
-              </a:spcBef>
-              <a:spcAft>
-                <a:spcPts val="0"/>
-              </a:spcAft>
-            </a:pPr>
+              <a:t>人工答辩项 3 条（不自动判达标，教师答辩时确认）:</a:t>
+            </a:r>
+          </a:p>
+          <a:p>
             <a:r>
               <a:rPr sz="950" b="0">
                 <a:solidFill>
@@ -29373,21 +29299,10 @@
                 </a:solidFill>
                 <a:latin typeface="微软雅黑"/>
               </a:rPr>
-              <a:t>在线演示: 「3号注塑机液压油温升高报警」→ 预测类别「液压系统」</a:t>
-            </a:r>
-          </a:p>
-          <a:p>
-            <a:pPr algn="l">
-              <a:lnSpc>
-                <a:spcPct val="110000"/>
-              </a:lnSpc>
-              <a:spcBef>
-                <a:spcPts val="0"/>
-              </a:spcBef>
-              <a:spcAft>
-                <a:spcPts val="0"/>
-              </a:spcAft>
-            </a:pPr>
+              <a:t>1. 关键词贡献解释清晰：能指出决定「电气系统」类的关键词并口述依据</a:t>
+            </a:r>
+          </a:p>
+          <a:p>
             <a:r>
               <a:rPr sz="950" b="0">
                 <a:solidFill>
@@ -29395,21 +29310,10 @@
                 </a:solidFill>
                 <a:latin typeface="微软雅黑"/>
               </a:rPr>
-              <a:t>结论: TF-IDF+线性模型即可高精度归类工业短文本；LLM 的价值在开放问答与生成解释（见 M4.2 RAG），二者互补而…</a:t>
-            </a:r>
-          </a:p>
-          <a:p>
-            <a:pPr algn="l">
-              <a:lnSpc>
-                <a:spcPct val="110000"/>
-              </a:lnSpc>
-              <a:spcBef>
-                <a:spcPts val="0"/>
-              </a:spcBef>
-              <a:spcAft>
-                <a:spcPts val="0"/>
-              </a:spcAft>
-            </a:pPr>
+              <a:t>2. 混淆矩阵「为何易混」归因分析（共用词/工况相似）可口述</a:t>
+            </a:r>
+          </a:p>
+          <a:p>
             <a:r>
               <a:rPr sz="950" b="0">
                 <a:solidFill>
@@ -29417,73 +29321,7 @@
                 </a:solidFill>
                 <a:latin typeface="微软雅黑"/>
               </a:rPr>
-              <a:t>[明细] 分类报告（测试集）:</a:t>
-            </a:r>
-          </a:p>
-          <a:p>
-            <a:pPr algn="l">
-              <a:lnSpc>
-                <a:spcPct val="110000"/>
-              </a:lnSpc>
-              <a:spcBef>
-                <a:spcPts val="0"/>
-              </a:spcBef>
-              <a:spcAft>
-                <a:spcPts val="0"/>
-              </a:spcAft>
-            </a:pPr>
-            <a:r>
-              <a:rPr sz="950" b="0">
-                <a:solidFill>
-                  <a:srgbClr val="44546A"/>
-                </a:solidFill>
-                <a:latin typeface="微软雅黑"/>
-              </a:rPr>
-              <a:t>              precision    recall  f1-score   support</a:t>
-            </a:r>
-          </a:p>
-          <a:p>
-            <a:pPr algn="l">
-              <a:lnSpc>
-                <a:spcPct val="110000"/>
-              </a:lnSpc>
-              <a:spcBef>
-                <a:spcPts val="0"/>
-              </a:spcBef>
-              <a:spcAft>
-                <a:spcPts val="0"/>
-              </a:spcAft>
-            </a:pPr>
-            <a:r>
-              <a:rPr sz="950" b="0">
-                <a:solidFill>
-                  <a:srgbClr val="44546A"/>
-                </a:solidFill>
-                <a:latin typeface="微软雅黑"/>
-              </a:rPr>
-              <a:t>        仪表气动       1.00      1.00      1.00        10</a:t>
-            </a:r>
-          </a:p>
-          <a:p>
-            <a:pPr algn="l">
-              <a:lnSpc>
-                <a:spcPct val="110000"/>
-              </a:lnSpc>
-              <a:spcBef>
-                <a:spcPts val="0"/>
-              </a:spcBef>
-              <a:spcAft>
-                <a:spcPts val="0"/>
-              </a:spcAft>
-            </a:pPr>
-            <a:r>
-              <a:rPr sz="950" b="0">
-                <a:solidFill>
-                  <a:srgbClr val="44546A"/>
-                </a:solidFill>
-                <a:latin typeface="微软雅黑"/>
-              </a:rPr>
-              <a:t>        传动系统       1.00      1.00      1.00         7</a:t>
+              <a:t>3. 决策矩阵权衡（准确率/训练速度/可解释性）能口述</a:t>
             </a:r>
           </a:p>
         </p:txBody>
@@ -30082,7 +29920,7 @@
                 </a:solidFill>
                 <a:latin typeface="微软雅黑"/>
               </a:rPr>
-              <a:t>32 / 71</a:t>
+              <a:t>32 / 74</a:t>
             </a:r>
           </a:p>
         </p:txBody>
@@ -30986,7 +30824,7 @@
                 </a:solidFill>
                 <a:latin typeface="微软雅黑"/>
               </a:rPr>
-              <a:t>33 / 71</a:t>
+              <a:t>33 / 74</a:t>
             </a:r>
           </a:p>
         </p:txBody>
@@ -31750,7 +31588,7 @@
         <p:spPr>
           <a:xfrm>
             <a:off x="940000" y="5720000"/>
-            <a:ext cx="10500000" cy="520000"/>
+            <a:ext cx="10500000" cy="731520"/>
           </a:xfrm>
           <a:prstGeom prst="rect">
             <a:avLst/>
@@ -31772,13 +31610,24 @@
               </a:spcAft>
             </a:pPr>
             <a:r>
-              <a:rPr sz="1350" b="1">
+              <a:rPr sz="1050" b="1">
                 <a:solidFill>
                   <a:srgbClr val="010328"/>
                 </a:solidFill>
                 <a:latin typeface="微软雅黑"/>
               </a:rPr>
               <a:t>✔ 达标标准: 能看懂词云</a:t>
+            </a:r>
+          </a:p>
+          <a:p>
+            <a:r>
+              <a:rPr sz="1050" b="1">
+                <a:solidFill>
+                  <a:srgbClr val="010328"/>
+                </a:solidFill>
+                <a:latin typeface="微软雅黑"/>
+              </a:rPr>
+              <a:t>✓ 本次实测达标 ｜ 规范率门槛≥60% [达标] ｜ 功能OK</a:t>
             </a:r>
           </a:p>
         </p:txBody>
@@ -31906,7 +31755,7 @@
                 </a:solidFill>
                 <a:latin typeface="微软雅黑"/>
               </a:rPr>
-              <a:t>34 / 71</a:t>
+              <a:t>37 / 74</a:t>
             </a:r>
           </a:p>
         </p:txBody>
@@ -32670,7 +32519,7 @@
         <p:spPr>
           <a:xfrm>
             <a:off x="940000" y="5720000"/>
-            <a:ext cx="10500000" cy="520000"/>
+            <a:ext cx="10500000" cy="731520"/>
           </a:xfrm>
           <a:prstGeom prst="rect">
             <a:avLst/>
@@ -32692,13 +32541,24 @@
               </a:spcAft>
             </a:pPr>
             <a:r>
-              <a:rPr sz="1350" b="1">
+              <a:rPr sz="1050" b="1">
                 <a:solidFill>
                   <a:srgbClr val="010328"/>
                 </a:solidFill>
                 <a:latin typeface="微软雅黑"/>
               </a:rPr>
               <a:t>✔ 达标标准: 准确率≥0.75</a:t>
+            </a:r>
+          </a:p>
+          <a:p>
+            <a:r>
+              <a:rPr sz="1050" b="1">
+                <a:solidFill>
+                  <a:srgbClr val="010328"/>
+                </a:solidFill>
+                <a:latin typeface="微软雅黑"/>
+              </a:rPr>
+              <a:t>✓ 本次实测达标 ｜ 规范率门槛≥70% [达标] ｜ 功能OK</a:t>
             </a:r>
           </a:p>
         </p:txBody>
@@ -32826,7 +32686,7 @@
                 </a:solidFill>
                 <a:latin typeface="微软雅黑"/>
               </a:rPr>
-              <a:t>35 / 71</a:t>
+              <a:t>38 / 74</a:t>
             </a:r>
           </a:p>
         </p:txBody>
@@ -33590,7 +33450,7 @@
         <p:spPr>
           <a:xfrm>
             <a:off x="940000" y="5720000"/>
-            <a:ext cx="10500000" cy="520000"/>
+            <a:ext cx="10500000" cy="731520"/>
           </a:xfrm>
           <a:prstGeom prst="rect">
             <a:avLst/>
@@ -33612,13 +33472,24 @@
               </a:spcAft>
             </a:pPr>
             <a:r>
-              <a:rPr sz="1350" b="1">
+              <a:rPr sz="1050" b="1">
                 <a:solidFill>
                   <a:srgbClr val="010328"/>
                 </a:solidFill>
                 <a:latin typeface="微软雅黑"/>
               </a:rPr>
               <a:t>✔ 达标标准: 准确率≥0.80</a:t>
+            </a:r>
+          </a:p>
+          <a:p>
+            <a:r>
+              <a:rPr sz="1050" b="1">
+                <a:solidFill>
+                  <a:srgbClr val="010328"/>
+                </a:solidFill>
+                <a:latin typeface="微软雅黑"/>
+              </a:rPr>
+              <a:t>✓ 本次实测达标 ｜ 规范率门槛≥80% [达标] ｜ 功能OK</a:t>
             </a:r>
           </a:p>
         </p:txBody>
@@ -33746,7 +33617,7 @@
                 </a:solidFill>
                 <a:latin typeface="微软雅黑"/>
               </a:rPr>
-              <a:t>36 / 71</a:t>
+              <a:t>39 / 74</a:t>
             </a:r>
           </a:p>
         </p:txBody>
@@ -34510,7 +34381,7 @@
         <p:spPr>
           <a:xfrm>
             <a:off x="940000" y="5720000"/>
-            <a:ext cx="10500000" cy="680000"/>
+            <a:ext cx="10500000" cy="731520"/>
           </a:xfrm>
           <a:prstGeom prst="rect">
             <a:avLst/>
@@ -34532,7 +34403,7 @@
               </a:spcAft>
             </a:pPr>
             <a:r>
-              <a:rPr sz="1350" b="1">
+              <a:rPr sz="1050" b="1">
                 <a:solidFill>
                   <a:srgbClr val="010328"/>
                 </a:solidFill>
@@ -34542,22 +34413,25 @@
             </a:r>
           </a:p>
           <a:p>
-            <a:pPr algn="l">
-              <a:lnSpc>
-                <a:spcPct val="115000"/>
-              </a:lnSpc>
-              <a:spcAft>
-                <a:spcPts val="600"/>
-              </a:spcAft>
-            </a:pPr>
-            <a:r>
-              <a:rPr sz="1150" b="0">
-                <a:solidFill>
-                  <a:srgbClr val="44546A"/>
+            <a:r>
+              <a:rPr sz="1050" b="1">
+                <a:solidFill>
+                  <a:srgbClr val="010328"/>
                 </a:solidFill>
                 <a:latin typeface="微软雅黑"/>
               </a:rPr>
               <a:t>(A层加码: 混淆矩阵分析哪两类易混并给出词表级解释（如液压vs传动共享词）)</a:t>
+            </a:r>
+          </a:p>
+          <a:p>
+            <a:r>
+              <a:rPr sz="1050" b="1">
+                <a:solidFill>
+                  <a:srgbClr val="010328"/>
+                </a:solidFill>
+                <a:latin typeface="微软雅黑"/>
+              </a:rPr>
+              <a:t>✓ 本次实测达标 ｜ 规范率门槛≥90% [达标] ｜ 功能OK</a:t>
             </a:r>
           </a:p>
         </p:txBody>
@@ -34685,7 +34559,7 @@
                 </a:solidFill>
                 <a:latin typeface="微软雅黑"/>
               </a:rPr>
-              <a:t>37 / 71</a:t>
+              <a:t>40 / 74</a:t>
             </a:r>
           </a:p>
         </p:txBody>
@@ -35729,7 +35603,7 @@
                 </a:solidFill>
                 <a:latin typeface="微软雅黑"/>
               </a:rPr>
-              <a:t>38 / 71</a:t>
+              <a:t>41 / 74</a:t>
             </a:r>
           </a:p>
         </p:txBody>
@@ -36653,7 +36527,7 @@
                 </a:solidFill>
                 <a:latin typeface="微软雅黑"/>
               </a:rPr>
-              <a:t>39 / 71</a:t>
+              <a:t>42 / 74</a:t>
             </a:r>
           </a:p>
         </p:txBody>
@@ -37508,7 +37382,7 @@
                 </a:solidFill>
                 <a:latin typeface="微软雅黑"/>
               </a:rPr>
-              <a:t>4 / 71</a:t>
+              <a:t>4 / 74</a:t>
             </a:r>
           </a:p>
         </p:txBody>
@@ -38300,7 +38174,7 @@
                 </a:solidFill>
                 <a:latin typeface="微软雅黑"/>
               </a:rPr>
-              <a:t>40 / 71</a:t>
+              <a:t>43 / 74</a:t>
             </a:r>
           </a:p>
         </p:txBody>
@@ -39092,7 +38966,7 @@
                 </a:solidFill>
                 <a:latin typeface="微软雅黑"/>
               </a:rPr>
-              <a:t>41 / 71</a:t>
+              <a:t>44 / 74</a:t>
             </a:r>
           </a:p>
         </p:txBody>
@@ -39884,7 +39758,7 @@
                 </a:solidFill>
                 <a:latin typeface="微软雅黑"/>
               </a:rPr>
-              <a:t>42 / 71</a:t>
+              <a:t>45 / 74</a:t>
             </a:r>
           </a:p>
         </p:txBody>
@@ -40739,7 +40613,7 @@
                 </a:solidFill>
                 <a:latin typeface="微软雅黑"/>
               </a:rPr>
-              <a:t>43 / 71</a:t>
+              <a:t>46 / 74</a:t>
             </a:r>
           </a:p>
         </p:txBody>
@@ -41447,7 +41321,7 @@
                 </a:solidFill>
                 <a:latin typeface="微软雅黑"/>
               </a:rPr>
-              <a:t>44 / 71</a:t>
+              <a:t>47 / 74</a:t>
             </a:r>
           </a:p>
         </p:txBody>
@@ -42087,7 +41961,7 @@
                 </a:solidFill>
                 <a:latin typeface="微软雅黑"/>
               </a:rPr>
-              <a:t>45 / 71</a:t>
+              <a:t>48 / 74</a:t>
             </a:r>
           </a:p>
         </p:txBody>
@@ -42672,7 +42546,7 @@
                 </a:solidFill>
                 <a:latin typeface="微软雅黑"/>
               </a:rPr>
-              <a:t>46 / 71</a:t>
+              <a:t>49 / 74</a:t>
             </a:r>
           </a:p>
         </p:txBody>
@@ -43464,7 +43338,7 @@
                 </a:solidFill>
                 <a:latin typeface="微软雅黑"/>
               </a:rPr>
-              <a:t>47 / 71</a:t>
+              <a:t>50 / 74</a:t>
             </a:r>
           </a:p>
         </p:txBody>
@@ -44566,7 +44440,7 @@
                 </a:solidFill>
                 <a:latin typeface="微软雅黑"/>
               </a:rPr>
-              <a:t>48 / 71</a:t>
+              <a:t>51 / 74</a:t>
             </a:r>
           </a:p>
         </p:txBody>
@@ -46198,7 +46072,7 @@
                 </a:solidFill>
                 <a:latin typeface="微软雅黑"/>
               </a:rPr>
-              <a:t>49 / 71</a:t>
+              <a:t>52 / 74</a:t>
             </a:r>
           </a:p>
         </p:txBody>
@@ -47170,7 +47044,7 @@
                 </a:solidFill>
                 <a:latin typeface="微软雅黑"/>
               </a:rPr>
-              <a:t>5 / 71</a:t>
+              <a:t>5 / 74</a:t>
             </a:r>
           </a:p>
         </p:txBody>
@@ -47968,7 +47842,7 @@
                 </a:solidFill>
                 <a:latin typeface="微软雅黑"/>
               </a:rPr>
-              <a:t>50 / 71</a:t>
+              <a:t>53 / 74</a:t>
             </a:r>
           </a:p>
         </p:txBody>
@@ -49114,7 +48988,7 @@
                 </a:solidFill>
                 <a:latin typeface="微软雅黑"/>
               </a:rPr>
-              <a:t>51 / 71</a:t>
+              <a:t>54 / 74</a:t>
             </a:r>
           </a:p>
         </p:txBody>
@@ -49776,7 +49650,7 @@
                 </a:solidFill>
                 <a:latin typeface="微软雅黑"/>
               </a:rPr>
-              <a:t>52 / 71</a:t>
+              <a:t>55 / 74</a:t>
             </a:r>
           </a:p>
         </p:txBody>
@@ -50629,7 +50503,7 @@
                 </a:solidFill>
                 <a:latin typeface="微软雅黑"/>
               </a:rPr>
-              <a:t>53 / 71</a:t>
+              <a:t>56 / 74</a:t>
             </a:r>
           </a:p>
         </p:txBody>
@@ -51601,7 +51475,7 @@
                 </a:solidFill>
                 <a:latin typeface="微软雅黑"/>
               </a:rPr>
-              <a:t>54 / 71</a:t>
+              <a:t>57 / 74</a:t>
             </a:r>
           </a:p>
         </p:txBody>
@@ -52573,7 +52447,7 @@
                 </a:solidFill>
                 <a:latin typeface="微软雅黑"/>
               </a:rPr>
-              <a:t>55 / 71</a:t>
+              <a:t>58 / 74</a:t>
             </a:r>
           </a:p>
         </p:txBody>
@@ -53545,7 +53419,7 @@
                 </a:solidFill>
                 <a:latin typeface="微软雅黑"/>
               </a:rPr>
-              <a:t>56 / 71</a:t>
+              <a:t>59 / 74</a:t>
             </a:r>
           </a:p>
         </p:txBody>
@@ -54337,7 +54211,7 @@
                 </a:solidFill>
                 <a:latin typeface="微软雅黑"/>
               </a:rPr>
-              <a:t>57 / 71</a:t>
+              <a:t>60 / 74</a:t>
             </a:r>
           </a:p>
         </p:txBody>
@@ -55211,7 +55085,7 @@
                 </a:solidFill>
                 <a:latin typeface="微软雅黑"/>
               </a:rPr>
-              <a:t>58 / 71</a:t>
+              <a:t>61 / 74</a:t>
             </a:r>
           </a:p>
         </p:txBody>
@@ -55917,7 +55791,7 @@
                 </a:solidFill>
                 <a:latin typeface="微软雅黑"/>
               </a:rPr>
-              <a:t>59 / 71</a:t>
+              <a:t>62 / 74</a:t>
             </a:r>
           </a:p>
         </p:txBody>
@@ -57385,7 +57259,7 @@
                 </a:solidFill>
                 <a:latin typeface="微软雅黑"/>
               </a:rPr>
-              <a:t>6 / 71</a:t>
+              <a:t>6 / 74</a:t>
             </a:r>
           </a:p>
         </p:txBody>
@@ -58091,7 +57965,7 @@
                 </a:solidFill>
                 <a:latin typeface="微软雅黑"/>
               </a:rPr>
-              <a:t>60 / 71</a:t>
+              <a:t>63 / 74</a:t>
             </a:r>
           </a:p>
         </p:txBody>
@@ -59063,7 +58937,7 @@
                 </a:solidFill>
                 <a:latin typeface="微软雅黑"/>
               </a:rPr>
-              <a:t>61 / 71</a:t>
+              <a:t>64 / 74</a:t>
             </a:r>
           </a:p>
         </p:txBody>
@@ -60322,7 +60196,7 @@
                 </a:solidFill>
                 <a:latin typeface="微软雅黑"/>
               </a:rPr>
-              <a:t>62 / 71</a:t>
+              <a:t>65 / 74</a:t>
             </a:r>
           </a:p>
         </p:txBody>
@@ -61294,7 +61168,7 @@
                 </a:solidFill>
                 <a:latin typeface="微软雅黑"/>
               </a:rPr>
-              <a:t>63 / 71</a:t>
+              <a:t>66 / 74</a:t>
             </a:r>
           </a:p>
         </p:txBody>
@@ -62266,7 +62140,7 @@
                 </a:solidFill>
                 <a:latin typeface="微软雅黑"/>
               </a:rPr>
-              <a:t>64 / 71</a:t>
+              <a:t>67 / 74</a:t>
             </a:r>
           </a:p>
         </p:txBody>
@@ -63058,7 +62932,7 @@
                 </a:solidFill>
                 <a:latin typeface="微软雅黑"/>
               </a:rPr>
-              <a:t>65 / 71</a:t>
+              <a:t>68 / 74</a:t>
             </a:r>
           </a:p>
         </p:txBody>
@@ -63850,7 +63724,7 @@
                 </a:solidFill>
                 <a:latin typeface="微软雅黑"/>
               </a:rPr>
-              <a:t>66 / 71</a:t>
+              <a:t>69 / 74</a:t>
             </a:r>
           </a:p>
         </p:txBody>
@@ -64822,7 +64696,7 @@
                 </a:solidFill>
                 <a:latin typeface="微软雅黑"/>
               </a:rPr>
-              <a:t>67 / 71</a:t>
+              <a:t>70 / 74</a:t>
             </a:r>
           </a:p>
         </p:txBody>
@@ -65794,7 +65668,7 @@
                 </a:solidFill>
                 <a:latin typeface="微软雅黑"/>
               </a:rPr>
-              <a:t>68 / 71</a:t>
+              <a:t>71 / 74</a:t>
             </a:r>
           </a:p>
         </p:txBody>
@@ -66586,7 +66460,7 @@
                 </a:solidFill>
                 <a:latin typeface="微软雅黑"/>
               </a:rPr>
-              <a:t>69 / 71</a:t>
+              <a:t>72 / 74</a:t>
             </a:r>
           </a:p>
         </p:txBody>
@@ -67292,7 +67166,7 @@
                 </a:solidFill>
                 <a:latin typeface="微软雅黑"/>
               </a:rPr>
-              <a:t>7 / 71</a:t>
+              <a:t>7 / 74</a:t>
             </a:r>
           </a:p>
         </p:txBody>
@@ -67652,7 +67526,7 @@
                 </a:solidFill>
                 <a:latin typeface="微软雅黑"/>
               </a:rPr>
-              <a:t>70 / 71</a:t>
+              <a:t>73 / 74</a:t>
             </a:r>
           </a:p>
         </p:txBody>
@@ -68023,6 +67897,2590 @@
 </p:sld>
 </file>
 
+<file path=ppt/slides/slide72.xml><?xml version="1.0" encoding="utf-8"?>
+<p:sld xmlns:a="http://schemas.openxmlformats.org/drawingml/2006/main" xmlns:p="http://schemas.openxmlformats.org/presentationml/2006/main" xmlns:r="http://schemas.openxmlformats.org/officeDocument/2006/relationships">
+  <p:cSld>
+    <p:spTree>
+      <p:nvGrpSpPr>
+        <p:cNvPr id="1" name=""/>
+        <p:cNvGrpSpPr/>
+        <p:nvPr/>
+      </p:nvGrpSpPr>
+      <p:grpSpPr/>
+      <p:sp>
+        <p:nvSpPr>
+          <p:cNvPr id="2" name="Rectangle 1"/>
+          <p:cNvSpPr/>
+          <p:nvPr/>
+        </p:nvSpPr>
+        <p:spPr>
+          <a:xfrm>
+            <a:off x="0" y="0"/>
+            <a:ext cx="12192000" cy="1150000"/>
+          </a:xfrm>
+          <a:prstGeom prst="rect">
+            <a:avLst/>
+          </a:prstGeom>
+          <a:solidFill>
+            <a:srgbClr val="010328"/>
+          </a:solidFill>
+          <a:ln>
+            <a:noFill/>
+          </a:ln>
+          <a:effectLst/>
+        </p:spPr>
+        <p:style>
+          <a:lnRef idx="1">
+            <a:schemeClr val="accent1"/>
+          </a:lnRef>
+          <a:fillRef idx="3">
+            <a:schemeClr val="accent1"/>
+          </a:fillRef>
+          <a:effectRef idx="2">
+            <a:schemeClr val="accent1"/>
+          </a:effectRef>
+          <a:fontRef idx="minor">
+            <a:schemeClr val="lt1"/>
+          </a:fontRef>
+        </p:style>
+        <p:txBody>
+          <a:bodyPr rtlCol="0" anchor="ctr"/>
+          <a:lstStyle/>
+          <a:p>
+            <a:pPr algn="ctr"/>
+          </a:p>
+        </p:txBody>
+      </p:sp>
+      <p:sp>
+        <p:nvSpPr>
+          <p:cNvPr id="3" name="Rectangle 2"/>
+          <p:cNvSpPr/>
+          <p:nvPr/>
+        </p:nvSpPr>
+        <p:spPr>
+          <a:xfrm>
+            <a:off x="0" y="1150000"/>
+            <a:ext cx="2600000" cy="70000"/>
+          </a:xfrm>
+          <a:prstGeom prst="rect">
+            <a:avLst/>
+          </a:prstGeom>
+          <a:solidFill>
+            <a:srgbClr val="F5670F"/>
+          </a:solidFill>
+          <a:ln>
+            <a:noFill/>
+          </a:ln>
+          <a:effectLst/>
+        </p:spPr>
+        <p:style>
+          <a:lnRef idx="1">
+            <a:schemeClr val="accent1"/>
+          </a:lnRef>
+          <a:fillRef idx="3">
+            <a:schemeClr val="accent1"/>
+          </a:fillRef>
+          <a:effectRef idx="2">
+            <a:schemeClr val="accent1"/>
+          </a:effectRef>
+          <a:fontRef idx="minor">
+            <a:schemeClr val="lt1"/>
+          </a:fontRef>
+        </p:style>
+        <p:txBody>
+          <a:bodyPr rtlCol="0" anchor="ctr"/>
+          <a:lstStyle/>
+          <a:p>
+            <a:pPr algn="ctr"/>
+          </a:p>
+        </p:txBody>
+      </p:sp>
+      <p:sp>
+        <p:nvSpPr>
+          <p:cNvPr id="4" name="TextBox 3"/>
+          <p:cNvSpPr txBox="1"/>
+          <p:nvPr/>
+        </p:nvSpPr>
+        <p:spPr>
+          <a:xfrm>
+            <a:off x="700000" y="300000"/>
+            <a:ext cx="10792000" cy="700000"/>
+          </a:xfrm>
+          <a:prstGeom prst="rect">
+            <a:avLst/>
+          </a:prstGeom>
+          <a:noFill/>
+        </p:spPr>
+        <p:txBody>
+          <a:bodyPr wrap="square" anchor="t">
+            <a:spAutoFit/>
+          </a:bodyPr>
+          <a:lstStyle/>
+          <a:p>
+            <a:pPr algn="l">
+              <a:lnSpc>
+                <a:spcPct val="110000"/>
+              </a:lnSpc>
+              <a:spcAft>
+                <a:spcPts val="600"/>
+              </a:spcAft>
+            </a:pPr>
+            <a:r>
+              <a:rPr sz="2400" b="1">
+                <a:solidFill>
+                  <a:srgbClr val="FFFFFF"/>
+                </a:solidFill>
+                <a:latin typeface="微软雅黑"/>
+              </a:rPr>
+              <a:t>实测验收 · m41_fault_text_clf</a:t>
+            </a:r>
+          </a:p>
+        </p:txBody>
+      </p:sp>
+      <p:sp>
+        <p:nvSpPr>
+          <p:cNvPr id="13" name="Rectangle 12"/>
+          <p:cNvSpPr/>
+          <p:nvPr/>
+        </p:nvSpPr>
+        <p:spPr>
+          <a:xfrm>
+            <a:off x="500000" y="6500000"/>
+            <a:ext cx="11100000" cy="20000"/>
+          </a:xfrm>
+          <a:prstGeom prst="rect">
+            <a:avLst/>
+          </a:prstGeom>
+          <a:solidFill>
+            <a:srgbClr val="C9D4EE"/>
+          </a:solidFill>
+          <a:ln>
+            <a:noFill/>
+          </a:ln>
+          <a:effectLst/>
+        </p:spPr>
+        <p:style>
+          <a:lnRef idx="1">
+            <a:schemeClr val="accent1"/>
+          </a:lnRef>
+          <a:fillRef idx="3">
+            <a:schemeClr val="accent1"/>
+          </a:fillRef>
+          <a:effectRef idx="2">
+            <a:schemeClr val="accent1"/>
+          </a:effectRef>
+          <a:fontRef idx="minor">
+            <a:schemeClr val="lt1"/>
+          </a:fontRef>
+        </p:style>
+        <p:txBody>
+          <a:bodyPr rtlCol="0" anchor="ctr"/>
+          <a:lstStyle/>
+          <a:p>
+            <a:pPr algn="ctr"/>
+          </a:p>
+        </p:txBody>
+      </p:sp>
+      <p:sp>
+        <p:nvSpPr>
+          <p:cNvPr id="14" name="TextBox 13"/>
+          <p:cNvSpPr txBox="1"/>
+          <p:nvPr/>
+        </p:nvSpPr>
+        <p:spPr>
+          <a:xfrm>
+            <a:off x="500000" y="6540000"/>
+            <a:ext cx="7000000" cy="300000"/>
+          </a:xfrm>
+          <a:prstGeom prst="rect">
+            <a:avLst/>
+          </a:prstGeom>
+          <a:noFill/>
+        </p:spPr>
+        <p:txBody>
+          <a:bodyPr wrap="square" anchor="t">
+            <a:spAutoFit/>
+          </a:bodyPr>
+          <a:lstStyle/>
+          <a:p>
+            <a:pPr algn="l">
+              <a:lnSpc>
+                <a:spcPct val="110000"/>
+              </a:lnSpc>
+              <a:spcAft>
+                <a:spcPts val="600"/>
+              </a:spcAft>
+            </a:pPr>
+            <a:r>
+              <a:rPr sz="1000" b="0">
+                <a:solidFill>
+                  <a:srgbClr val="8A97B5"/>
+                </a:solidFill>
+                <a:latin typeface="微软雅黑"/>
+              </a:rPr>
+              <a:t>两江智造集团 · AI应用基础</a:t>
+            </a:r>
+          </a:p>
+        </p:txBody>
+      </p:sp>
+      <p:sp>
+        <p:nvSpPr>
+          <p:cNvPr id="15" name="TextBox 14"/>
+          <p:cNvSpPr txBox="1"/>
+          <p:nvPr/>
+        </p:nvSpPr>
+        <p:spPr>
+          <a:xfrm>
+            <a:off x="10600000" y="6540000"/>
+            <a:ext cx="1000000" cy="300000"/>
+          </a:xfrm>
+          <a:prstGeom prst="rect">
+            <a:avLst/>
+          </a:prstGeom>
+          <a:noFill/>
+        </p:spPr>
+        <p:txBody>
+          <a:bodyPr wrap="square" anchor="t">
+            <a:spAutoFit/>
+          </a:bodyPr>
+          <a:lstStyle/>
+          <a:p>
+            <a:pPr algn="r">
+              <a:lnSpc>
+                <a:spcPct val="110000"/>
+              </a:lnSpc>
+              <a:spcAft>
+                <a:spcPts val="600"/>
+              </a:spcAft>
+            </a:pPr>
+            <a:r>
+              <a:rPr sz="1000" b="0">
+                <a:solidFill>
+                  <a:srgbClr val="8A97B5"/>
+                </a:solidFill>
+                <a:latin typeface="微软雅黑"/>
+              </a:rPr>
+              <a:t>34 / 74</a:t>
+            </a:r>
+          </a:p>
+        </p:txBody>
+      </p:sp>
+      <p:sp>
+        <p:nvSpPr>
+          <p:cNvPr id="16" name="Rectangle 15"/>
+          <p:cNvSpPr/>
+          <p:nvPr/>
+        </p:nvSpPr>
+        <p:spPr>
+          <a:xfrm>
+            <a:off x="0" y="1371600"/>
+            <a:ext cx="12188952" cy="713232"/>
+          </a:xfrm>
+          <a:prstGeom prst="rect">
+            <a:avLst/>
+          </a:prstGeom>
+          <a:solidFill>
+            <a:srgbClr val="F2F5F9"/>
+          </a:solidFill>
+          <a:ln>
+            <a:noFill/>
+          </a:ln>
+          <a:effectLst/>
+        </p:spPr>
+        <p:style>
+          <a:lnRef idx="1">
+            <a:schemeClr val="accent1"/>
+          </a:lnRef>
+          <a:fillRef idx="3">
+            <a:schemeClr val="accent1"/>
+          </a:fillRef>
+          <a:effectRef idx="2">
+            <a:schemeClr val="accent1"/>
+          </a:effectRef>
+          <a:fontRef idx="minor">
+            <a:schemeClr val="lt1"/>
+          </a:fontRef>
+        </p:style>
+        <p:txBody>
+          <a:bodyPr rtlCol="0" anchor="ctr" wrap="square"/>
+          <a:lstStyle/>
+          <a:p>
+            <a:pPr algn="ctr"/>
+          </a:p>
+        </p:txBody>
+      </p:sp>
+      <p:sp>
+        <p:nvSpPr>
+          <p:cNvPr id="17" name="TextBox 16"/>
+          <p:cNvSpPr txBox="1"/>
+          <p:nvPr/>
+        </p:nvSpPr>
+        <p:spPr>
+          <a:xfrm>
+            <a:off x="457200" y="1426464"/>
+            <a:ext cx="2651760" cy="566928"/>
+          </a:xfrm>
+          <a:prstGeom prst="rect">
+            <a:avLst/>
+          </a:prstGeom>
+          <a:noFill/>
+        </p:spPr>
+        <p:txBody>
+          <a:bodyPr wrap="square">
+            <a:spAutoFit/>
+          </a:bodyPr>
+          <a:lstStyle/>
+          <a:p>
+            <a:r>
+              <a:rPr sz="1400" b="1">
+                <a:solidFill>
+                  <a:srgbClr val="2E7D46"/>
+                </a:solidFill>
+                <a:latin typeface="微软雅黑"/>
+              </a:rPr>
+              <a:t>实测达成档位</a:t>
+            </a:r>
+          </a:p>
+          <a:p>
+            <a:r>
+              <a:rPr sz="1400" b="1">
+                <a:solidFill>
+                  <a:srgbClr val="2E7D46"/>
+                </a:solidFill>
+                <a:latin typeface="微软雅黑"/>
+              </a:rPr>
+              <a:t>优(A)</a:t>
+            </a:r>
+          </a:p>
+        </p:txBody>
+      </p:sp>
+      <p:sp>
+        <p:nvSpPr>
+          <p:cNvPr id="18" name="Rectangle 17"/>
+          <p:cNvSpPr/>
+          <p:nvPr/>
+        </p:nvSpPr>
+        <p:spPr>
+          <a:xfrm>
+            <a:off x="3200400" y="1426464"/>
+            <a:ext cx="1627632" cy="603504"/>
+          </a:xfrm>
+          <a:prstGeom prst="rect">
+            <a:avLst/>
+          </a:prstGeom>
+          <a:solidFill>
+            <a:srgbClr val="FFFFFF"/>
+          </a:solidFill>
+          <a:ln>
+            <a:solidFill>
+              <a:srgbClr val="D6DCE4"/>
+            </a:solidFill>
+          </a:ln>
+          <a:effectLst/>
+        </p:spPr>
+        <p:style>
+          <a:lnRef idx="1">
+            <a:schemeClr val="accent1"/>
+          </a:lnRef>
+          <a:fillRef idx="3">
+            <a:schemeClr val="accent1"/>
+          </a:fillRef>
+          <a:effectRef idx="2">
+            <a:schemeClr val="accent1"/>
+          </a:effectRef>
+          <a:fontRef idx="minor">
+            <a:schemeClr val="lt1"/>
+          </a:fontRef>
+        </p:style>
+        <p:txBody>
+          <a:bodyPr rtlCol="0" anchor="ctr" wrap="square"/>
+          <a:lstStyle/>
+          <a:p>
+            <a:pPr algn="ctr"/>
+          </a:p>
+        </p:txBody>
+      </p:sp>
+      <p:sp>
+        <p:nvSpPr>
+          <p:cNvPr id="19" name="TextBox 18"/>
+          <p:cNvSpPr txBox="1"/>
+          <p:nvPr/>
+        </p:nvSpPr>
+        <p:spPr>
+          <a:xfrm>
+            <a:off x="3246120" y="1463040"/>
+            <a:ext cx="1536192" cy="548640"/>
+          </a:xfrm>
+          <a:prstGeom prst="rect">
+            <a:avLst/>
+          </a:prstGeom>
+          <a:noFill/>
+        </p:spPr>
+        <p:txBody>
+          <a:bodyPr wrap="square">
+            <a:spAutoFit/>
+          </a:bodyPr>
+          <a:lstStyle/>
+          <a:p>
+            <a:r>
+              <a:rPr sz="900" b="0">
+                <a:solidFill>
+                  <a:srgbClr val="35506E"/>
+                </a:solidFill>
+                <a:latin typeface="微软雅黑"/>
+              </a:rPr>
+              <a:t>终模型准确率 1.0000</a:t>
+            </a:r>
+          </a:p>
+        </p:txBody>
+      </p:sp>
+      <p:sp>
+        <p:nvSpPr>
+          <p:cNvPr id="20" name="Rectangle 19"/>
+          <p:cNvSpPr/>
+          <p:nvPr/>
+        </p:nvSpPr>
+        <p:spPr>
+          <a:xfrm>
+            <a:off x="4901184" y="1426464"/>
+            <a:ext cx="1627632" cy="603504"/>
+          </a:xfrm>
+          <a:prstGeom prst="rect">
+            <a:avLst/>
+          </a:prstGeom>
+          <a:solidFill>
+            <a:srgbClr val="FFFFFF"/>
+          </a:solidFill>
+          <a:ln>
+            <a:solidFill>
+              <a:srgbClr val="D6DCE4"/>
+            </a:solidFill>
+          </a:ln>
+          <a:effectLst/>
+        </p:spPr>
+        <p:style>
+          <a:lnRef idx="1">
+            <a:schemeClr val="accent1"/>
+          </a:lnRef>
+          <a:fillRef idx="3">
+            <a:schemeClr val="accent1"/>
+          </a:fillRef>
+          <a:effectRef idx="2">
+            <a:schemeClr val="accent1"/>
+          </a:effectRef>
+          <a:fontRef idx="minor">
+            <a:schemeClr val="lt1"/>
+          </a:fontRef>
+        </p:style>
+        <p:txBody>
+          <a:bodyPr rtlCol="0" anchor="ctr" wrap="square"/>
+          <a:lstStyle/>
+          <a:p>
+            <a:pPr algn="ctr"/>
+          </a:p>
+        </p:txBody>
+      </p:sp>
+      <p:sp>
+        <p:nvSpPr>
+          <p:cNvPr id="21" name="TextBox 20"/>
+          <p:cNvSpPr txBox="1"/>
+          <p:nvPr/>
+        </p:nvSpPr>
+        <p:spPr>
+          <a:xfrm>
+            <a:off x="4946904" y="1463040"/>
+            <a:ext cx="1536192" cy="548640"/>
+          </a:xfrm>
+          <a:prstGeom prst="rect">
+            <a:avLst/>
+          </a:prstGeom>
+          <a:noFill/>
+        </p:spPr>
+        <p:txBody>
+          <a:bodyPr wrap="square">
+            <a:spAutoFit/>
+          </a:bodyPr>
+          <a:lstStyle/>
+          <a:p>
+            <a:r>
+              <a:rPr sz="900" b="0">
+                <a:solidFill>
+                  <a:srgbClr val="35506E"/>
+                </a:solidFill>
+                <a:latin typeface="微软雅黑"/>
+              </a:rPr>
+              <a:t>库外新文本预测 6 条(命中 5)</a:t>
+            </a:r>
+          </a:p>
+        </p:txBody>
+      </p:sp>
+      <p:sp>
+        <p:nvSpPr>
+          <p:cNvPr id="22" name="Rectangle 21"/>
+          <p:cNvSpPr/>
+          <p:nvPr/>
+        </p:nvSpPr>
+        <p:spPr>
+          <a:xfrm>
+            <a:off x="6601968" y="1426464"/>
+            <a:ext cx="1627632" cy="603504"/>
+          </a:xfrm>
+          <a:prstGeom prst="rect">
+            <a:avLst/>
+          </a:prstGeom>
+          <a:solidFill>
+            <a:srgbClr val="FFFFFF"/>
+          </a:solidFill>
+          <a:ln>
+            <a:solidFill>
+              <a:srgbClr val="D6DCE4"/>
+            </a:solidFill>
+          </a:ln>
+          <a:effectLst/>
+        </p:spPr>
+        <p:style>
+          <a:lnRef idx="1">
+            <a:schemeClr val="accent1"/>
+          </a:lnRef>
+          <a:fillRef idx="3">
+            <a:schemeClr val="accent1"/>
+          </a:fillRef>
+          <a:effectRef idx="2">
+            <a:schemeClr val="accent1"/>
+          </a:effectRef>
+          <a:fontRef idx="minor">
+            <a:schemeClr val="lt1"/>
+          </a:fontRef>
+        </p:style>
+        <p:txBody>
+          <a:bodyPr rtlCol="0" anchor="ctr" wrap="square"/>
+          <a:lstStyle/>
+          <a:p>
+            <a:pPr algn="ctr"/>
+          </a:p>
+        </p:txBody>
+      </p:sp>
+      <p:sp>
+        <p:nvSpPr>
+          <p:cNvPr id="23" name="TextBox 22"/>
+          <p:cNvSpPr txBox="1"/>
+          <p:nvPr/>
+        </p:nvSpPr>
+        <p:spPr>
+          <a:xfrm>
+            <a:off x="6647688" y="1463040"/>
+            <a:ext cx="1536192" cy="548640"/>
+          </a:xfrm>
+          <a:prstGeom prst="rect">
+            <a:avLst/>
+          </a:prstGeom>
+          <a:noFill/>
+        </p:spPr>
+        <p:txBody>
+          <a:bodyPr wrap="square">
+            <a:spAutoFit/>
+          </a:bodyPr>
+          <a:lstStyle/>
+          <a:p>
+            <a:r>
+              <a:rPr sz="900" b="0">
+                <a:solidFill>
+                  <a:srgbClr val="35506E"/>
+                </a:solidFill>
+                <a:latin typeface="微软雅黑"/>
+              </a:rPr>
+              <a:t>对比模型 4 个</a:t>
+            </a:r>
+          </a:p>
+        </p:txBody>
+      </p:sp>
+      <p:sp>
+        <p:nvSpPr>
+          <p:cNvPr id="24" name="Rectangle 23"/>
+          <p:cNvSpPr/>
+          <p:nvPr/>
+        </p:nvSpPr>
+        <p:spPr>
+          <a:xfrm>
+            <a:off x="8302752" y="1426464"/>
+            <a:ext cx="1627632" cy="603504"/>
+          </a:xfrm>
+          <a:prstGeom prst="rect">
+            <a:avLst/>
+          </a:prstGeom>
+          <a:solidFill>
+            <a:srgbClr val="FFFFFF"/>
+          </a:solidFill>
+          <a:ln>
+            <a:solidFill>
+              <a:srgbClr val="D6DCE4"/>
+            </a:solidFill>
+          </a:ln>
+          <a:effectLst/>
+        </p:spPr>
+        <p:style>
+          <a:lnRef idx="1">
+            <a:schemeClr val="accent1"/>
+          </a:lnRef>
+          <a:fillRef idx="3">
+            <a:schemeClr val="accent1"/>
+          </a:fillRef>
+          <a:effectRef idx="2">
+            <a:schemeClr val="accent1"/>
+          </a:effectRef>
+          <a:fontRef idx="minor">
+            <a:schemeClr val="lt1"/>
+          </a:fontRef>
+        </p:style>
+        <p:txBody>
+          <a:bodyPr rtlCol="0" anchor="ctr" wrap="square"/>
+          <a:lstStyle/>
+          <a:p>
+            <a:pPr algn="ctr"/>
+          </a:p>
+        </p:txBody>
+      </p:sp>
+      <p:sp>
+        <p:nvSpPr>
+          <p:cNvPr id="25" name="TextBox 24"/>
+          <p:cNvSpPr txBox="1"/>
+          <p:nvPr/>
+        </p:nvSpPr>
+        <p:spPr>
+          <a:xfrm>
+            <a:off x="8348472" y="1463040"/>
+            <a:ext cx="1536192" cy="548640"/>
+          </a:xfrm>
+          <a:prstGeom prst="rect">
+            <a:avLst/>
+          </a:prstGeom>
+          <a:noFill/>
+        </p:spPr>
+        <p:txBody>
+          <a:bodyPr wrap="square">
+            <a:spAutoFit/>
+          </a:bodyPr>
+          <a:lstStyle/>
+          <a:p>
+            <a:r>
+              <a:rPr sz="900" b="0">
+                <a:solidFill>
+                  <a:srgbClr val="35506E"/>
+                </a:solidFill>
+                <a:latin typeface="微软雅黑"/>
+              </a:rPr>
+              <a:t>关键词覆盖 5/5 类</a:t>
+            </a:r>
+          </a:p>
+        </p:txBody>
+      </p:sp>
+      <p:sp>
+        <p:nvSpPr>
+          <p:cNvPr id="26" name="Rectangle 25"/>
+          <p:cNvSpPr/>
+          <p:nvPr/>
+        </p:nvSpPr>
+        <p:spPr>
+          <a:xfrm>
+            <a:off x="10003536" y="1426464"/>
+            <a:ext cx="1627632" cy="603504"/>
+          </a:xfrm>
+          <a:prstGeom prst="rect">
+            <a:avLst/>
+          </a:prstGeom>
+          <a:solidFill>
+            <a:srgbClr val="FFFFFF"/>
+          </a:solidFill>
+          <a:ln>
+            <a:solidFill>
+              <a:srgbClr val="D6DCE4"/>
+            </a:solidFill>
+          </a:ln>
+          <a:effectLst/>
+        </p:spPr>
+        <p:style>
+          <a:lnRef idx="1">
+            <a:schemeClr val="accent1"/>
+          </a:lnRef>
+          <a:fillRef idx="3">
+            <a:schemeClr val="accent1"/>
+          </a:fillRef>
+          <a:effectRef idx="2">
+            <a:schemeClr val="accent1"/>
+          </a:effectRef>
+          <a:fontRef idx="minor">
+            <a:schemeClr val="lt1"/>
+          </a:fontRef>
+        </p:style>
+        <p:txBody>
+          <a:bodyPr rtlCol="0" anchor="ctr" wrap="square"/>
+          <a:lstStyle/>
+          <a:p>
+            <a:pPr algn="ctr"/>
+          </a:p>
+        </p:txBody>
+      </p:sp>
+      <p:sp>
+        <p:nvSpPr>
+          <p:cNvPr id="27" name="TextBox 26"/>
+          <p:cNvSpPr txBox="1"/>
+          <p:nvPr/>
+        </p:nvSpPr>
+        <p:spPr>
+          <a:xfrm>
+            <a:off x="10049256" y="1463040"/>
+            <a:ext cx="1536192" cy="548640"/>
+          </a:xfrm>
+          <a:prstGeom prst="rect">
+            <a:avLst/>
+          </a:prstGeom>
+          <a:noFill/>
+        </p:spPr>
+        <p:txBody>
+          <a:bodyPr wrap="square">
+            <a:spAutoFit/>
+          </a:bodyPr>
+          <a:lstStyle/>
+          <a:p>
+            <a:r>
+              <a:rPr sz="900" b="0">
+                <a:solidFill>
+                  <a:srgbClr val="35506E"/>
+                </a:solidFill>
+                <a:latin typeface="微软雅黑"/>
+              </a:rPr>
+              <a:t>易混类对: 仪表气动↔电气系统×5（预测正确时的第二选择近误计数）</a:t>
+            </a:r>
+          </a:p>
+        </p:txBody>
+      </p:sp>
+      <p:graphicFrame>
+        <p:nvGraphicFramePr>
+          <p:cNvPr id="28" name="Table 27"/>
+          <p:cNvGraphicFramePr>
+            <a:graphicFrameLocks noGrp="1"/>
+          </p:cNvGraphicFramePr>
+          <p:nvPr/>
+        </p:nvGraphicFramePr>
+        <p:xfrm>
+          <a:off x="457200" y="2212848"/>
+          <a:ext cx="11274552" cy="2834640"/>
+        </p:xfrm>
+        <a:graphic>
+          <a:graphicData uri="http://schemas.openxmlformats.org/drawingml/2006/table">
+            <a:tbl>
+              <a:tblPr firstRow="1" bandRow="1">
+                <a:tableStyleId>{5C22544A-7EE6-4342-B048-85BDC9FD1C3A}</a:tableStyleId>
+              </a:tblPr>
+              <a:tblGrid>
+                <a:gridCol w="1188720"/>
+                <a:gridCol w="5120640"/>
+                <a:gridCol w="3886200"/>
+                <a:gridCol w="1078992"/>
+              </a:tblGrid>
+              <a:tr h="566928">
+                <a:tc>
+                  <a:txBody>
+                    <a:bodyPr/>
+                    <a:lstStyle/>
+                    <a:p>
+                      <a:r>
+                        <a:rPr sz="1050" b="1">
+                          <a:solidFill>
+                            <a:srgbClr val="FFFFFF"/>
+                          </a:solidFill>
+                          <a:latin typeface="微软雅黑"/>
+                        </a:rPr>
+                        <a:t>档位</a:t>
+                      </a:r>
+                    </a:p>
+                  </a:txBody>
+                  <a:tcPr>
+                    <a:solidFill>
+                      <a:srgbClr val="010328"/>
+                    </a:solidFill>
+                  </a:tcPr>
+                </a:tc>
+                <a:tc>
+                  <a:txBody>
+                    <a:bodyPr/>
+                    <a:lstStyle/>
+                    <a:p>
+                      <a:r>
+                        <a:rPr sz="1050" b="1">
+                          <a:solidFill>
+                            <a:srgbClr val="FFFFFF"/>
+                          </a:solidFill>
+                          <a:latin typeface="微软雅黑"/>
+                        </a:rPr>
+                        <a:t>工单验收标准（原文）</a:t>
+                      </a:r>
+                    </a:p>
+                  </a:txBody>
+                  <a:tcPr>
+                    <a:solidFill>
+                      <a:srgbClr val="010328"/>
+                    </a:solidFill>
+                  </a:tcPr>
+                </a:tc>
+                <a:tc>
+                  <a:txBody>
+                    <a:bodyPr/>
+                    <a:lstStyle/>
+                    <a:p>
+                      <a:r>
+                        <a:rPr sz="1050" b="1">
+                          <a:solidFill>
+                            <a:srgbClr val="FFFFFF"/>
+                          </a:solidFill>
+                          <a:latin typeface="微软雅黑"/>
+                        </a:rPr>
+                        <a:t>本次实测判定</a:t>
+                      </a:r>
+                    </a:p>
+                  </a:txBody>
+                  <a:tcPr>
+                    <a:solidFill>
+                      <a:srgbClr val="010328"/>
+                    </a:solidFill>
+                  </a:tcPr>
+                </a:tc>
+                <a:tc>
+                  <a:txBody>
+                    <a:bodyPr/>
+                    <a:lstStyle/>
+                    <a:p>
+                      <a:r>
+                        <a:rPr sz="1050" b="1">
+                          <a:solidFill>
+                            <a:srgbClr val="FFFFFF"/>
+                          </a:solidFill>
+                          <a:latin typeface="微软雅黑"/>
+                        </a:rPr>
+                        <a:t>判定</a:t>
+                      </a:r>
+                    </a:p>
+                  </a:txBody>
+                  <a:tcPr>
+                    <a:solidFill>
+                      <a:srgbClr val="010328"/>
+                    </a:solidFill>
+                  </a:tcPr>
+                </a:tc>
+              </a:tr>
+              <a:tr h="566928">
+                <a:tc>
+                  <a:txBody>
+                    <a:bodyPr/>
+                    <a:lstStyle/>
+                    <a:p>
+                      <a:r>
+                        <a:rPr sz="1000" b="1">
+                          <a:solidFill>
+                            <a:srgbClr val="2B2F36"/>
+                          </a:solidFill>
+                          <a:latin typeface="微软雅黑"/>
+                        </a:rPr>
+                        <a:t>及格(D)</a:t>
+                      </a:r>
+                    </a:p>
+                  </a:txBody>
+                  <a:tcPr>
+                    <a:solidFill>
+                      <a:srgbClr val="FFFFFF"/>
+                    </a:solidFill>
+                  </a:tcPr>
+                </a:tc>
+                <a:tc>
+                  <a:txBody>
+                    <a:bodyPr/>
+                    <a:lstStyle/>
+                    <a:p>
+                      <a:r>
+                        <a:rPr sz="950" b="0">
+                          <a:solidFill>
+                            <a:srgbClr val="2B2F36"/>
+                          </a:solidFill>
+                          <a:latin typeface="微软雅黑"/>
+                        </a:rPr>
+                        <a:t>准确率≥门槛 + 库外新文本实测预测命中</a:t>
+                      </a:r>
+                    </a:p>
+                  </a:txBody>
+                  <a:tcPr>
+                    <a:solidFill>
+                      <a:srgbClr val="FFFFFF"/>
+                    </a:solidFill>
+                  </a:tcPr>
+                </a:tc>
+                <a:tc>
+                  <a:txBody>
+                    <a:bodyPr/>
+                    <a:lstStyle/>
+                    <a:p>
+                      <a:r>
+                        <a:rPr sz="950" b="0">
+                          <a:solidFill>
+                            <a:srgbClr val="2B2F36"/>
+                          </a:solidFill>
+                          <a:latin typeface="微软雅黑"/>
+                        </a:rPr>
+                        <a:t>规范率门槛≥60% [达标] ｜ 功能OK</a:t>
+                      </a:r>
+                    </a:p>
+                  </a:txBody>
+                  <a:tcPr>
+                    <a:solidFill>
+                      <a:srgbClr val="FFFFFF"/>
+                    </a:solidFill>
+                  </a:tcPr>
+                </a:tc>
+                <a:tc>
+                  <a:txBody>
+                    <a:bodyPr/>
+                    <a:lstStyle/>
+                    <a:p>
+                      <a:r>
+                        <a:rPr sz="1000" b="1">
+                          <a:solidFill>
+                            <a:srgbClr val="2E7D46"/>
+                          </a:solidFill>
+                          <a:latin typeface="微软雅黑"/>
+                        </a:rPr>
+                        <a:t>✓ 达标</a:t>
+                      </a:r>
+                    </a:p>
+                  </a:txBody>
+                  <a:tcPr>
+                    <a:solidFill>
+                      <a:srgbClr val="FFFFFF"/>
+                    </a:solidFill>
+                  </a:tcPr>
+                </a:tc>
+              </a:tr>
+              <a:tr h="566928">
+                <a:tc>
+                  <a:txBody>
+                    <a:bodyPr/>
+                    <a:lstStyle/>
+                    <a:p>
+                      <a:r>
+                        <a:rPr sz="1000" b="1">
+                          <a:solidFill>
+                            <a:srgbClr val="2B2F36"/>
+                          </a:solidFill>
+                          <a:latin typeface="微软雅黑"/>
+                        </a:rPr>
+                        <a:t>良好(C)</a:t>
+                      </a:r>
+                    </a:p>
+                  </a:txBody>
+                  <a:tcPr>
+                    <a:solidFill>
+                      <a:srgbClr val="F7F9FB"/>
+                    </a:solidFill>
+                  </a:tcPr>
+                </a:tc>
+                <a:tc>
+                  <a:txBody>
+                    <a:bodyPr/>
+                    <a:lstStyle/>
+                    <a:p>
+                      <a:r>
+                        <a:rPr sz="950" b="0">
+                          <a:solidFill>
+                            <a:srgbClr val="2B2F36"/>
+                          </a:solidFill>
+                          <a:latin typeface="微软雅黑"/>
+                        </a:rPr>
+                        <a:t>准确率≥门槛 + 朴素贝叶斯/逻辑回归同切分对比完整</a:t>
+                      </a:r>
+                    </a:p>
+                  </a:txBody>
+                  <a:tcPr>
+                    <a:solidFill>
+                      <a:srgbClr val="F7F9FB"/>
+                    </a:solidFill>
+                  </a:tcPr>
+                </a:tc>
+                <a:tc>
+                  <a:txBody>
+                    <a:bodyPr/>
+                    <a:lstStyle/>
+                    <a:p>
+                      <a:r>
+                        <a:rPr sz="950" b="0">
+                          <a:solidFill>
+                            <a:srgbClr val="2B2F36"/>
+                          </a:solidFill>
+                          <a:latin typeface="微软雅黑"/>
+                        </a:rPr>
+                        <a:t>规范率门槛≥70% [达标] ｜ 功能OK</a:t>
+                      </a:r>
+                    </a:p>
+                  </a:txBody>
+                  <a:tcPr>
+                    <a:solidFill>
+                      <a:srgbClr val="F7F9FB"/>
+                    </a:solidFill>
+                  </a:tcPr>
+                </a:tc>
+                <a:tc>
+                  <a:txBody>
+                    <a:bodyPr/>
+                    <a:lstStyle/>
+                    <a:p>
+                      <a:r>
+                        <a:rPr sz="1000" b="1">
+                          <a:solidFill>
+                            <a:srgbClr val="2E7D46"/>
+                          </a:solidFill>
+                          <a:latin typeface="微软雅黑"/>
+                        </a:rPr>
+                        <a:t>✓ 达标</a:t>
+                      </a:r>
+                    </a:p>
+                  </a:txBody>
+                  <a:tcPr>
+                    <a:solidFill>
+                      <a:srgbClr val="F7F9FB"/>
+                    </a:solidFill>
+                  </a:tcPr>
+                </a:tc>
+              </a:tr>
+              <a:tr h="566928">
+                <a:tc>
+                  <a:txBody>
+                    <a:bodyPr/>
+                    <a:lstStyle/>
+                    <a:p>
+                      <a:r>
+                        <a:rPr sz="1000" b="1">
+                          <a:solidFill>
+                            <a:srgbClr val="2B2F36"/>
+                          </a:solidFill>
+                          <a:latin typeface="微软雅黑"/>
+                        </a:rPr>
+                        <a:t>优秀(B)</a:t>
+                      </a:r>
+                    </a:p>
+                  </a:txBody>
+                  <a:tcPr>
+                    <a:solidFill>
+                      <a:srgbClr val="FFFFFF"/>
+                    </a:solidFill>
+                  </a:tcPr>
+                </a:tc>
+                <a:tc>
+                  <a:txBody>
+                    <a:bodyPr/>
+                    <a:lstStyle/>
+                    <a:p>
+                      <a:r>
+                        <a:rPr sz="950" b="0">
+                          <a:solidFill>
+                            <a:srgbClr val="2B2F36"/>
+                          </a:solidFill>
+                          <a:latin typeface="微软雅黑"/>
+                        </a:rPr>
+                        <a:t>准确率≥门槛 + 每类 Top10 关键词表全类覆盖</a:t>
+                      </a:r>
+                    </a:p>
+                  </a:txBody>
+                  <a:tcPr>
+                    <a:solidFill>
+                      <a:srgbClr val="FFFFFF"/>
+                    </a:solidFill>
+                  </a:tcPr>
+                </a:tc>
+                <a:tc>
+                  <a:txBody>
+                    <a:bodyPr/>
+                    <a:lstStyle/>
+                    <a:p>
+                      <a:r>
+                        <a:rPr sz="950" b="0">
+                          <a:solidFill>
+                            <a:srgbClr val="2B2F36"/>
+                          </a:solidFill>
+                          <a:latin typeface="微软雅黑"/>
+                        </a:rPr>
+                        <a:t>规范率门槛≥80% [达标] ｜ 功能OK</a:t>
+                      </a:r>
+                    </a:p>
+                  </a:txBody>
+                  <a:tcPr>
+                    <a:solidFill>
+                      <a:srgbClr val="FFFFFF"/>
+                    </a:solidFill>
+                  </a:tcPr>
+                </a:tc>
+                <a:tc>
+                  <a:txBody>
+                    <a:bodyPr/>
+                    <a:lstStyle/>
+                    <a:p>
+                      <a:r>
+                        <a:rPr sz="1000" b="1">
+                          <a:solidFill>
+                            <a:srgbClr val="2E7D46"/>
+                          </a:solidFill>
+                          <a:latin typeface="微软雅黑"/>
+                        </a:rPr>
+                        <a:t>✓ 达标</a:t>
+                      </a:r>
+                    </a:p>
+                  </a:txBody>
+                  <a:tcPr>
+                    <a:solidFill>
+                      <a:srgbClr val="FFFFFF"/>
+                    </a:solidFill>
+                  </a:tcPr>
+                </a:tc>
+              </a:tr>
+              <a:tr h="566928">
+                <a:tc>
+                  <a:txBody>
+                    <a:bodyPr/>
+                    <a:lstStyle/>
+                    <a:p>
+                      <a:r>
+                        <a:rPr sz="1000" b="1">
+                          <a:solidFill>
+                            <a:srgbClr val="2B2F36"/>
+                          </a:solidFill>
+                          <a:latin typeface="微软雅黑"/>
+                        </a:rPr>
+                        <a:t>优(A)</a:t>
+                      </a:r>
+                    </a:p>
+                  </a:txBody>
+                  <a:tcPr>
+                    <a:solidFill>
+                      <a:srgbClr val="F7F9FB"/>
+                    </a:solidFill>
+                  </a:tcPr>
+                </a:tc>
+                <a:tc>
+                  <a:txBody>
+                    <a:bodyPr/>
+                    <a:lstStyle/>
+                    <a:p>
+                      <a:r>
+                        <a:rPr sz="950" b="0">
+                          <a:solidFill>
+                            <a:srgbClr val="2B2F36"/>
+                          </a:solidFill>
+                          <a:latin typeface="微软雅黑"/>
+                        </a:rPr>
+                        <a:t>达 B 且：混淆矩阵实测定位最易混类对；自建词典+ngram 实测调优</a:t>
+                      </a:r>
+                    </a:p>
+                  </a:txBody>
+                  <a:tcPr>
+                    <a:solidFill>
+                      <a:srgbClr val="F7F9FB"/>
+                    </a:solidFill>
+                  </a:tcPr>
+                </a:tc>
+                <a:tc>
+                  <a:txBody>
+                    <a:bodyPr/>
+                    <a:lstStyle/>
+                    <a:p>
+                      <a:r>
+                        <a:rPr sz="950" b="0">
+                          <a:solidFill>
+                            <a:srgbClr val="2B2F36"/>
+                          </a:solidFill>
+                          <a:latin typeface="微软雅黑"/>
+                        </a:rPr>
+                        <a:t>规范率门槛≥90% [达标] ｜ 功能OK</a:t>
+                      </a:r>
+                    </a:p>
+                  </a:txBody>
+                  <a:tcPr>
+                    <a:solidFill>
+                      <a:srgbClr val="F7F9FB"/>
+                    </a:solidFill>
+                  </a:tcPr>
+                </a:tc>
+                <a:tc>
+                  <a:txBody>
+                    <a:bodyPr/>
+                    <a:lstStyle/>
+                    <a:p>
+                      <a:r>
+                        <a:rPr sz="1000" b="1">
+                          <a:solidFill>
+                            <a:srgbClr val="2E7D46"/>
+                          </a:solidFill>
+                          <a:latin typeface="微软雅黑"/>
+                        </a:rPr>
+                        <a:t>✓ 达标</a:t>
+                      </a:r>
+                    </a:p>
+                  </a:txBody>
+                  <a:tcPr>
+                    <a:solidFill>
+                      <a:srgbClr val="F7F9FB"/>
+                    </a:solidFill>
+                  </a:tcPr>
+                </a:tc>
+              </a:tr>
+            </a:tbl>
+          </a:graphicData>
+        </a:graphic>
+      </p:graphicFrame>
+      <p:sp>
+        <p:nvSpPr>
+          <p:cNvPr id="29" name="Rectangle 28"/>
+          <p:cNvSpPr/>
+          <p:nvPr/>
+        </p:nvSpPr>
+        <p:spPr>
+          <a:xfrm>
+            <a:off x="457200" y="5138928"/>
+            <a:ext cx="11274552" cy="1261872"/>
+          </a:xfrm>
+          <a:prstGeom prst="rect">
+            <a:avLst/>
+          </a:prstGeom>
+          <a:solidFill>
+            <a:srgbClr val="FFF7E8"/>
+          </a:solidFill>
+          <a:ln>
+            <a:solidFill>
+              <a:srgbClr val="E8C88A"/>
+            </a:solidFill>
+          </a:ln>
+          <a:effectLst/>
+        </p:spPr>
+        <p:style>
+          <a:lnRef idx="1">
+            <a:schemeClr val="accent1"/>
+          </a:lnRef>
+          <a:fillRef idx="3">
+            <a:schemeClr val="accent1"/>
+          </a:fillRef>
+          <a:effectRef idx="2">
+            <a:schemeClr val="accent1"/>
+          </a:effectRef>
+          <a:fontRef idx="minor">
+            <a:schemeClr val="lt1"/>
+          </a:fontRef>
+        </p:style>
+        <p:txBody>
+          <a:bodyPr rtlCol="0" anchor="ctr" wrap="square"/>
+          <a:lstStyle/>
+          <a:p>
+            <a:pPr algn="ctr"/>
+          </a:p>
+        </p:txBody>
+      </p:sp>
+      <p:sp>
+        <p:nvSpPr>
+          <p:cNvPr id="30" name="TextBox 29"/>
+          <p:cNvSpPr txBox="1"/>
+          <p:nvPr/>
+        </p:nvSpPr>
+        <p:spPr>
+          <a:xfrm>
+            <a:off x="621792" y="5212080"/>
+            <a:ext cx="10927080" cy="1133856"/>
+          </a:xfrm>
+          <a:prstGeom prst="rect">
+            <a:avLst/>
+          </a:prstGeom>
+          <a:noFill/>
+        </p:spPr>
+        <p:txBody>
+          <a:bodyPr wrap="square">
+            <a:spAutoFit/>
+          </a:bodyPr>
+          <a:lstStyle/>
+          <a:p>
+            <a:r>
+              <a:rPr sz="950" b="0">
+                <a:solidFill>
+                  <a:srgbClr val="6B4E16"/>
+                </a:solidFill>
+                <a:latin typeface="微软雅黑"/>
+              </a:rPr>
+              <a:t>人工答辩项 3 条（代码不代判，答辩现场确认）：. 关键词贡献解释清晰：能指出决定「电气系统」类的关键词并口述依据；. 混淆矩阵「为何易混」归因分析（共用词/工况相似）可口述；. 决策矩阵权衡（准确率/训练速度/可解释性）能口述</a:t>
+            </a:r>
+          </a:p>
+          <a:p>
+            <a:r>
+              <a:rPr sz="950" b="0">
+                <a:solidFill>
+                  <a:srgbClr val="6B4E16"/>
+                </a:solidFill>
+                <a:latin typeface="微软雅黑"/>
+              </a:rPr>
+              <a:t>档位是算出来的：判定值由 run.py 本次真跑产生；工单未给数字的门槛在报告里标注为「兜底口径·非工单数字」。</a:t>
+            </a:r>
+          </a:p>
+          <a:p>
+            <a:r>
+              <a:rPr sz="950" b="0">
+                <a:solidFill>
+                  <a:srgbClr val="6B4E16"/>
+                </a:solidFill>
+                <a:latin typeface="微软雅黑"/>
+              </a:rPr>
+              <a:t>实测值共 6 项，本页只列前 5 项，其余见下页 report.txt 截图。</a:t>
+            </a:r>
+          </a:p>
+        </p:txBody>
+      </p:sp>
+    </p:spTree>
+  </p:cSld>
+  <p:clrMapOvr>
+    <a:masterClrMapping/>
+  </p:clrMapOvr>
+</p:sld>
+</file>
+
+<file path=ppt/slides/slide73.xml><?xml version="1.0" encoding="utf-8"?>
+<p:sld xmlns:a="http://schemas.openxmlformats.org/drawingml/2006/main" xmlns:p="http://schemas.openxmlformats.org/presentationml/2006/main" xmlns:r="http://schemas.openxmlformats.org/officeDocument/2006/relationships">
+  <p:cSld>
+    <p:spTree>
+      <p:nvGrpSpPr>
+        <p:cNvPr id="1" name=""/>
+        <p:cNvGrpSpPr/>
+        <p:nvPr/>
+      </p:nvGrpSpPr>
+      <p:grpSpPr/>
+      <p:sp>
+        <p:nvSpPr>
+          <p:cNvPr id="2" name="Rectangle 1"/>
+          <p:cNvSpPr/>
+          <p:nvPr/>
+        </p:nvSpPr>
+        <p:spPr>
+          <a:xfrm>
+            <a:off x="0" y="0"/>
+            <a:ext cx="12192000" cy="1150000"/>
+          </a:xfrm>
+          <a:prstGeom prst="rect">
+            <a:avLst/>
+          </a:prstGeom>
+          <a:solidFill>
+            <a:srgbClr val="010328"/>
+          </a:solidFill>
+          <a:ln>
+            <a:noFill/>
+          </a:ln>
+          <a:effectLst/>
+        </p:spPr>
+        <p:style>
+          <a:lnRef idx="1">
+            <a:schemeClr val="accent1"/>
+          </a:lnRef>
+          <a:fillRef idx="3">
+            <a:schemeClr val="accent1"/>
+          </a:fillRef>
+          <a:effectRef idx="2">
+            <a:schemeClr val="accent1"/>
+          </a:effectRef>
+          <a:fontRef idx="minor">
+            <a:schemeClr val="lt1"/>
+          </a:fontRef>
+        </p:style>
+        <p:txBody>
+          <a:bodyPr rtlCol="0" anchor="ctr"/>
+          <a:lstStyle/>
+          <a:p>
+            <a:pPr algn="ctr"/>
+          </a:p>
+        </p:txBody>
+      </p:sp>
+      <p:sp>
+        <p:nvSpPr>
+          <p:cNvPr id="3" name="Rectangle 2"/>
+          <p:cNvSpPr/>
+          <p:nvPr/>
+        </p:nvSpPr>
+        <p:spPr>
+          <a:xfrm>
+            <a:off x="0" y="1150000"/>
+            <a:ext cx="2600000" cy="70000"/>
+          </a:xfrm>
+          <a:prstGeom prst="rect">
+            <a:avLst/>
+          </a:prstGeom>
+          <a:solidFill>
+            <a:srgbClr val="F5670F"/>
+          </a:solidFill>
+          <a:ln>
+            <a:noFill/>
+          </a:ln>
+          <a:effectLst/>
+        </p:spPr>
+        <p:style>
+          <a:lnRef idx="1">
+            <a:schemeClr val="accent1"/>
+          </a:lnRef>
+          <a:fillRef idx="3">
+            <a:schemeClr val="accent1"/>
+          </a:fillRef>
+          <a:effectRef idx="2">
+            <a:schemeClr val="accent1"/>
+          </a:effectRef>
+          <a:fontRef idx="minor">
+            <a:schemeClr val="lt1"/>
+          </a:fontRef>
+        </p:style>
+        <p:txBody>
+          <a:bodyPr rtlCol="0" anchor="ctr"/>
+          <a:lstStyle/>
+          <a:p>
+            <a:pPr algn="ctr"/>
+          </a:p>
+        </p:txBody>
+      </p:sp>
+      <p:sp>
+        <p:nvSpPr>
+          <p:cNvPr id="4" name="TextBox 3"/>
+          <p:cNvSpPr txBox="1"/>
+          <p:nvPr/>
+        </p:nvSpPr>
+        <p:spPr>
+          <a:xfrm>
+            <a:off x="700000" y="300000"/>
+            <a:ext cx="10792000" cy="700000"/>
+          </a:xfrm>
+          <a:prstGeom prst="rect">
+            <a:avLst/>
+          </a:prstGeom>
+          <a:noFill/>
+        </p:spPr>
+        <p:txBody>
+          <a:bodyPr wrap="square" anchor="t">
+            <a:spAutoFit/>
+          </a:bodyPr>
+          <a:lstStyle/>
+          <a:p>
+            <a:pPr algn="l">
+              <a:lnSpc>
+                <a:spcPct val="110000"/>
+              </a:lnSpc>
+              <a:spcAft>
+                <a:spcPts val="600"/>
+              </a:spcAft>
+            </a:pPr>
+            <a:r>
+              <a:rPr sz="2400" b="1">
+                <a:solidFill>
+                  <a:srgbClr val="FFFFFF"/>
+                </a:solidFill>
+                <a:latin typeface="微软雅黑"/>
+              </a:rPr>
+              <a:t>实跑截图证据 · m41_fault_text_clf</a:t>
+            </a:r>
+          </a:p>
+        </p:txBody>
+      </p:sp>
+      <p:sp>
+        <p:nvSpPr>
+          <p:cNvPr id="13" name="Rectangle 12"/>
+          <p:cNvSpPr/>
+          <p:nvPr/>
+        </p:nvSpPr>
+        <p:spPr>
+          <a:xfrm>
+            <a:off x="500000" y="6500000"/>
+            <a:ext cx="11100000" cy="20000"/>
+          </a:xfrm>
+          <a:prstGeom prst="rect">
+            <a:avLst/>
+          </a:prstGeom>
+          <a:solidFill>
+            <a:srgbClr val="C9D4EE"/>
+          </a:solidFill>
+          <a:ln>
+            <a:noFill/>
+          </a:ln>
+          <a:effectLst/>
+        </p:spPr>
+        <p:style>
+          <a:lnRef idx="1">
+            <a:schemeClr val="accent1"/>
+          </a:lnRef>
+          <a:fillRef idx="3">
+            <a:schemeClr val="accent1"/>
+          </a:fillRef>
+          <a:effectRef idx="2">
+            <a:schemeClr val="accent1"/>
+          </a:effectRef>
+          <a:fontRef idx="minor">
+            <a:schemeClr val="lt1"/>
+          </a:fontRef>
+        </p:style>
+        <p:txBody>
+          <a:bodyPr rtlCol="0" anchor="ctr"/>
+          <a:lstStyle/>
+          <a:p>
+            <a:pPr algn="ctr"/>
+          </a:p>
+        </p:txBody>
+      </p:sp>
+      <p:sp>
+        <p:nvSpPr>
+          <p:cNvPr id="14" name="TextBox 13"/>
+          <p:cNvSpPr txBox="1"/>
+          <p:nvPr/>
+        </p:nvSpPr>
+        <p:spPr>
+          <a:xfrm>
+            <a:off x="500000" y="6540000"/>
+            <a:ext cx="7000000" cy="300000"/>
+          </a:xfrm>
+          <a:prstGeom prst="rect">
+            <a:avLst/>
+          </a:prstGeom>
+          <a:noFill/>
+        </p:spPr>
+        <p:txBody>
+          <a:bodyPr wrap="square" anchor="t">
+            <a:spAutoFit/>
+          </a:bodyPr>
+          <a:lstStyle/>
+          <a:p>
+            <a:pPr algn="l">
+              <a:lnSpc>
+                <a:spcPct val="110000"/>
+              </a:lnSpc>
+              <a:spcAft>
+                <a:spcPts val="600"/>
+              </a:spcAft>
+            </a:pPr>
+            <a:r>
+              <a:rPr sz="1000" b="0">
+                <a:solidFill>
+                  <a:srgbClr val="8A97B5"/>
+                </a:solidFill>
+                <a:latin typeface="微软雅黑"/>
+              </a:rPr>
+              <a:t>两江智造集团 · AI应用基础</a:t>
+            </a:r>
+          </a:p>
+        </p:txBody>
+      </p:sp>
+      <p:sp>
+        <p:nvSpPr>
+          <p:cNvPr id="15" name="TextBox 14"/>
+          <p:cNvSpPr txBox="1"/>
+          <p:nvPr/>
+        </p:nvSpPr>
+        <p:spPr>
+          <a:xfrm>
+            <a:off x="10600000" y="6540000"/>
+            <a:ext cx="1000000" cy="300000"/>
+          </a:xfrm>
+          <a:prstGeom prst="rect">
+            <a:avLst/>
+          </a:prstGeom>
+          <a:noFill/>
+        </p:spPr>
+        <p:txBody>
+          <a:bodyPr wrap="square" anchor="t">
+            <a:spAutoFit/>
+          </a:bodyPr>
+          <a:lstStyle/>
+          <a:p>
+            <a:pPr algn="r">
+              <a:lnSpc>
+                <a:spcPct val="110000"/>
+              </a:lnSpc>
+              <a:spcAft>
+                <a:spcPts val="600"/>
+              </a:spcAft>
+            </a:pPr>
+            <a:r>
+              <a:rPr sz="1000" b="0">
+                <a:solidFill>
+                  <a:srgbClr val="8A97B5"/>
+                </a:solidFill>
+                <a:latin typeface="微软雅黑"/>
+              </a:rPr>
+              <a:t>35 / 74</a:t>
+            </a:r>
+          </a:p>
+        </p:txBody>
+      </p:sp>
+      <p:sp>
+        <p:nvSpPr>
+          <p:cNvPr id="16" name="Rectangle 15"/>
+          <p:cNvSpPr/>
+          <p:nvPr/>
+        </p:nvSpPr>
+        <p:spPr>
+          <a:xfrm>
+            <a:off x="457200" y="1481328"/>
+            <a:ext cx="5486400" cy="2304288"/>
+          </a:xfrm>
+          <a:prstGeom prst="rect">
+            <a:avLst/>
+          </a:prstGeom>
+          <a:solidFill>
+            <a:srgbClr val="FFFFFF"/>
+          </a:solidFill>
+          <a:ln>
+            <a:solidFill>
+              <a:srgbClr val="D6DCE4"/>
+            </a:solidFill>
+          </a:ln>
+          <a:effectLst/>
+        </p:spPr>
+        <p:style>
+          <a:lnRef idx="1">
+            <a:schemeClr val="accent1"/>
+          </a:lnRef>
+          <a:fillRef idx="3">
+            <a:schemeClr val="accent1"/>
+          </a:fillRef>
+          <a:effectRef idx="2">
+            <a:schemeClr val="accent1"/>
+          </a:effectRef>
+          <a:fontRef idx="minor">
+            <a:schemeClr val="lt1"/>
+          </a:fontRef>
+        </p:style>
+        <p:txBody>
+          <a:bodyPr rtlCol="0" anchor="ctr" wrap="square"/>
+          <a:lstStyle/>
+          <a:p>
+            <a:pPr algn="ctr"/>
+          </a:p>
+        </p:txBody>
+      </p:sp>
+      <p:sp>
+        <p:nvSpPr>
+          <p:cNvPr id="17" name="TextBox 16"/>
+          <p:cNvSpPr txBox="1"/>
+          <p:nvPr/>
+        </p:nvSpPr>
+        <p:spPr>
+          <a:xfrm>
+            <a:off x="530352" y="1517904"/>
+            <a:ext cx="5340096" cy="237744"/>
+          </a:xfrm>
+          <a:prstGeom prst="rect">
+            <a:avLst/>
+          </a:prstGeom>
+          <a:noFill/>
+        </p:spPr>
+        <p:txBody>
+          <a:bodyPr wrap="square">
+            <a:spAutoFit/>
+          </a:bodyPr>
+          <a:lstStyle/>
+          <a:p>
+            <a:r>
+              <a:rPr sz="950" b="1">
+                <a:solidFill>
+                  <a:srgbClr val="010328"/>
+                </a:solidFill>
+                <a:latin typeface="微软雅黑"/>
+              </a:rPr>
+              <a:t>① run.py 实跑终端输出（逐字捕获）</a:t>
+            </a:r>
+          </a:p>
+        </p:txBody>
+      </p:sp>
+      <p:pic>
+        <p:nvPicPr>
+          <p:cNvPr id="18" name="Picture 17" descr="shot_run.png"/>
+          <p:cNvPicPr>
+            <a:picLocks noChangeAspect="1"/>
+          </p:cNvPicPr>
+          <p:nvPr/>
+        </p:nvPicPr>
+        <p:blipFill>
+          <a:blip r:embed="rId2"/>
+          <a:stretch>
+            <a:fillRect/>
+          </a:stretch>
+        </p:blipFill>
+        <p:spPr>
+          <a:xfrm>
+            <a:off x="964038" y="1773936"/>
+            <a:ext cx="4472722" cy="1956816"/>
+          </a:xfrm>
+          <a:prstGeom prst="rect">
+            <a:avLst/>
+          </a:prstGeom>
+        </p:spPr>
+      </p:pic>
+      <p:sp>
+        <p:nvSpPr>
+          <p:cNvPr id="19" name="Rectangle 18"/>
+          <p:cNvSpPr/>
+          <p:nvPr/>
+        </p:nvSpPr>
+        <p:spPr>
+          <a:xfrm>
+            <a:off x="6327648" y="1481328"/>
+            <a:ext cx="5486400" cy="2304288"/>
+          </a:xfrm>
+          <a:prstGeom prst="rect">
+            <a:avLst/>
+          </a:prstGeom>
+          <a:solidFill>
+            <a:srgbClr val="FFFFFF"/>
+          </a:solidFill>
+          <a:ln>
+            <a:solidFill>
+              <a:srgbClr val="D6DCE4"/>
+            </a:solidFill>
+          </a:ln>
+          <a:effectLst/>
+        </p:spPr>
+        <p:style>
+          <a:lnRef idx="1">
+            <a:schemeClr val="accent1"/>
+          </a:lnRef>
+          <a:fillRef idx="3">
+            <a:schemeClr val="accent1"/>
+          </a:fillRef>
+          <a:effectRef idx="2">
+            <a:schemeClr val="accent1"/>
+          </a:effectRef>
+          <a:fontRef idx="minor">
+            <a:schemeClr val="lt1"/>
+          </a:fontRef>
+        </p:style>
+        <p:txBody>
+          <a:bodyPr rtlCol="0" anchor="ctr" wrap="square"/>
+          <a:lstStyle/>
+          <a:p>
+            <a:pPr algn="ctr"/>
+          </a:p>
+        </p:txBody>
+      </p:sp>
+      <p:sp>
+        <p:nvSpPr>
+          <p:cNvPr id="20" name="TextBox 19"/>
+          <p:cNvSpPr txBox="1"/>
+          <p:nvPr/>
+        </p:nvSpPr>
+        <p:spPr>
+          <a:xfrm>
+            <a:off x="6400800" y="1517904"/>
+            <a:ext cx="5340096" cy="237744"/>
+          </a:xfrm>
+          <a:prstGeom prst="rect">
+            <a:avLst/>
+          </a:prstGeom>
+          <a:noFill/>
+        </p:spPr>
+        <p:txBody>
+          <a:bodyPr wrap="square">
+            <a:spAutoFit/>
+          </a:bodyPr>
+          <a:lstStyle/>
+          <a:p>
+            <a:r>
+              <a:rPr sz="950" b="1">
+                <a:solidFill>
+                  <a:srgbClr val="010328"/>
+                </a:solidFill>
+                <a:latin typeface="微软雅黑"/>
+              </a:rPr>
+              <a:t>② pytest 全绿终端输出（逐字捕获）</a:t>
+            </a:r>
+          </a:p>
+        </p:txBody>
+      </p:sp>
+      <p:pic>
+        <p:nvPicPr>
+          <p:cNvPr id="21" name="Picture 20" descr="shot_test.png"/>
+          <p:cNvPicPr>
+            <a:picLocks noChangeAspect="1"/>
+          </p:cNvPicPr>
+          <p:nvPr/>
+        </p:nvPicPr>
+        <p:blipFill>
+          <a:blip r:embed="rId3"/>
+          <a:stretch>
+            <a:fillRect/>
+          </a:stretch>
+        </p:blipFill>
+        <p:spPr>
+          <a:xfrm>
+            <a:off x="6834486" y="1773936"/>
+            <a:ext cx="4472722" cy="1956816"/>
+          </a:xfrm>
+          <a:prstGeom prst="rect">
+            <a:avLst/>
+          </a:prstGeom>
+        </p:spPr>
+      </p:pic>
+      <p:sp>
+        <p:nvSpPr>
+          <p:cNvPr id="22" name="Rectangle 21"/>
+          <p:cNvSpPr/>
+          <p:nvPr/>
+        </p:nvSpPr>
+        <p:spPr>
+          <a:xfrm>
+            <a:off x="457200" y="3877056"/>
+            <a:ext cx="5486400" cy="2304288"/>
+          </a:xfrm>
+          <a:prstGeom prst="rect">
+            <a:avLst/>
+          </a:prstGeom>
+          <a:solidFill>
+            <a:srgbClr val="FFFFFF"/>
+          </a:solidFill>
+          <a:ln>
+            <a:solidFill>
+              <a:srgbClr val="D6DCE4"/>
+            </a:solidFill>
+          </a:ln>
+          <a:effectLst/>
+        </p:spPr>
+        <p:style>
+          <a:lnRef idx="1">
+            <a:schemeClr val="accent1"/>
+          </a:lnRef>
+          <a:fillRef idx="3">
+            <a:schemeClr val="accent1"/>
+          </a:fillRef>
+          <a:effectRef idx="2">
+            <a:schemeClr val="accent1"/>
+          </a:effectRef>
+          <a:fontRef idx="minor">
+            <a:schemeClr val="lt1"/>
+          </a:fontRef>
+        </p:style>
+        <p:txBody>
+          <a:bodyPr rtlCol="0" anchor="ctr" wrap="square"/>
+          <a:lstStyle/>
+          <a:p>
+            <a:pPr algn="ctr"/>
+          </a:p>
+        </p:txBody>
+      </p:sp>
+      <p:sp>
+        <p:nvSpPr>
+          <p:cNvPr id="23" name="TextBox 22"/>
+          <p:cNvSpPr txBox="1"/>
+          <p:nvPr/>
+        </p:nvSpPr>
+        <p:spPr>
+          <a:xfrm>
+            <a:off x="530352" y="3913632"/>
+            <a:ext cx="5340096" cy="237744"/>
+          </a:xfrm>
+          <a:prstGeom prst="rect">
+            <a:avLst/>
+          </a:prstGeom>
+          <a:noFill/>
+        </p:spPr>
+        <p:txBody>
+          <a:bodyPr wrap="square">
+            <a:spAutoFit/>
+          </a:bodyPr>
+          <a:lstStyle/>
+          <a:p>
+            <a:r>
+              <a:rPr sz="950" b="1">
+                <a:solidFill>
+                  <a:srgbClr val="010328"/>
+                </a:solidFill>
+                <a:latin typeface="微软雅黑"/>
+              </a:rPr>
+              <a:t>③ report.txt「验收档位判定（实测）」段</a:t>
+            </a:r>
+          </a:p>
+        </p:txBody>
+      </p:sp>
+      <p:pic>
+        <p:nvPicPr>
+          <p:cNvPr id="24" name="Picture 23" descr="shot_report.png"/>
+          <p:cNvPicPr>
+            <a:picLocks noChangeAspect="1"/>
+          </p:cNvPicPr>
+          <p:nvPr/>
+        </p:nvPicPr>
+        <p:blipFill>
+          <a:blip r:embed="rId4"/>
+          <a:stretch>
+            <a:fillRect/>
+          </a:stretch>
+        </p:blipFill>
+        <p:spPr>
+          <a:xfrm>
+            <a:off x="964038" y="4169664"/>
+            <a:ext cx="4472722" cy="1956816"/>
+          </a:xfrm>
+          <a:prstGeom prst="rect">
+            <a:avLst/>
+          </a:prstGeom>
+        </p:spPr>
+      </p:pic>
+      <p:sp>
+        <p:nvSpPr>
+          <p:cNvPr id="25" name="Rectangle 24"/>
+          <p:cNvSpPr/>
+          <p:nvPr/>
+        </p:nvSpPr>
+        <p:spPr>
+          <a:xfrm>
+            <a:off x="6327648" y="3877056"/>
+            <a:ext cx="5486400" cy="2304288"/>
+          </a:xfrm>
+          <a:prstGeom prst="rect">
+            <a:avLst/>
+          </a:prstGeom>
+          <a:solidFill>
+            <a:srgbClr val="F7F9FB"/>
+          </a:solidFill>
+          <a:ln>
+            <a:solidFill>
+              <a:srgbClr val="D6DCE4"/>
+            </a:solidFill>
+          </a:ln>
+          <a:effectLst/>
+        </p:spPr>
+        <p:style>
+          <a:lnRef idx="1">
+            <a:schemeClr val="accent1"/>
+          </a:lnRef>
+          <a:fillRef idx="3">
+            <a:schemeClr val="accent1"/>
+          </a:fillRef>
+          <a:effectRef idx="2">
+            <a:schemeClr val="accent1"/>
+          </a:effectRef>
+          <a:fontRef idx="minor">
+            <a:schemeClr val="lt1"/>
+          </a:fontRef>
+        </p:style>
+        <p:txBody>
+          <a:bodyPr rtlCol="0" anchor="ctr" wrap="square"/>
+          <a:lstStyle/>
+          <a:p>
+            <a:pPr algn="ctr"/>
+          </a:p>
+        </p:txBody>
+      </p:sp>
+      <p:sp>
+        <p:nvSpPr>
+          <p:cNvPr id="26" name="TextBox 25"/>
+          <p:cNvSpPr txBox="1"/>
+          <p:nvPr/>
+        </p:nvSpPr>
+        <p:spPr>
+          <a:xfrm>
+            <a:off x="6400800" y="3913632"/>
+            <a:ext cx="5340096" cy="237744"/>
+          </a:xfrm>
+          <a:prstGeom prst="rect">
+            <a:avLst/>
+          </a:prstGeom>
+          <a:noFill/>
+        </p:spPr>
+        <p:txBody>
+          <a:bodyPr wrap="square">
+            <a:spAutoFit/>
+          </a:bodyPr>
+          <a:lstStyle/>
+          <a:p>
+            <a:r>
+              <a:rPr sz="950" b="1">
+                <a:solidFill>
+                  <a:srgbClr val="010328"/>
+                </a:solidFill>
+                <a:latin typeface="微软雅黑"/>
+              </a:rPr>
+              <a:t>④ 采集口径（可复现）</a:t>
+            </a:r>
+          </a:p>
+        </p:txBody>
+      </p:sp>
+      <p:sp>
+        <p:nvSpPr>
+          <p:cNvPr id="27" name="TextBox 26"/>
+          <p:cNvSpPr txBox="1"/>
+          <p:nvPr/>
+        </p:nvSpPr>
+        <p:spPr>
+          <a:xfrm>
+            <a:off x="6437376" y="4187952"/>
+            <a:ext cx="5266944" cy="1920240"/>
+          </a:xfrm>
+          <a:prstGeom prst="rect">
+            <a:avLst/>
+          </a:prstGeom>
+          <a:noFill/>
+        </p:spPr>
+        <p:txBody>
+          <a:bodyPr wrap="square">
+            <a:spAutoFit/>
+          </a:bodyPr>
+          <a:lstStyle/>
+          <a:p>
+            <a:r>
+              <a:rPr sz="950" b="0">
+                <a:solidFill>
+                  <a:srgbClr val="2B2F36"/>
+                </a:solidFill>
+                <a:latin typeface="微软雅黑"/>
+              </a:rPr>
+              <a:t>项目：01-AI应用基础/工程化项目/m41_fault_text_clf/</a:t>
+            </a:r>
+          </a:p>
+          <a:p>
+            <a:r>
+              <a:rPr sz="950" b="0">
+                <a:solidFill>
+                  <a:srgbClr val="2B2F36"/>
+                </a:solidFill>
+                <a:latin typeface="微软雅黑"/>
+              </a:rPr>
+              <a:t>命令：/opt/anaconda3/bin/python run.py ｜ /opt/anaconda3/bin/python -m pytest -q</a:t>
+            </a:r>
+          </a:p>
+          <a:p>
+            <a:r>
+              <a:rPr sz="950" b="0">
+                <a:solidFill>
+                  <a:srgbClr val="2B2F36"/>
+                </a:solidFill>
+                <a:latin typeface="微软雅黑"/>
+              </a:rPr>
+              <a:t>采集：工具/ppt97/capture97.py（2026-10-28 10:46 真跑逐字捕获输出）</a:t>
+            </a:r>
+          </a:p>
+          <a:p>
+            <a:r>
+              <a:rPr sz="950" b="0">
+                <a:solidFill>
+                  <a:srgbClr val="2B2F36"/>
+                </a:solidFill>
+                <a:latin typeface="微软雅黑"/>
+              </a:rPr>
+              <a:t>渲染：工具/ppt97/terminal_png.py（终端截图，不改写任何数字）</a:t>
+            </a:r>
+          </a:p>
+          <a:p>
+            <a:r>
+              <a:rPr sz="950" b="0">
+                <a:solidFill>
+                  <a:srgbClr val="2B2F36"/>
+                </a:solidFill>
+                <a:latin typeface="微软雅黑"/>
+              </a:rPr>
+              <a:t>退出码：run=0 ｜ pytest=0</a:t>
+            </a:r>
+          </a:p>
+          <a:p>
+            <a:r>
+              <a:rPr sz="950" b="0">
+                <a:solidFill>
+                  <a:srgbClr val="2B2F36"/>
+                </a:solidFill>
+                <a:latin typeface="微软雅黑"/>
+              </a:rPr>
+              <a:t>档位判定取自 output/report.txt「验收档位判定（实测）」段</a:t>
+            </a:r>
+          </a:p>
+        </p:txBody>
+      </p:sp>
+      <p:sp>
+        <p:nvSpPr>
+          <p:cNvPr id="28" name="TextBox 27"/>
+          <p:cNvSpPr txBox="1"/>
+          <p:nvPr/>
+        </p:nvSpPr>
+        <p:spPr>
+          <a:xfrm>
+            <a:off x="457200" y="6254496"/>
+            <a:ext cx="11247120" cy="201168"/>
+          </a:xfrm>
+          <a:prstGeom prst="rect">
+            <a:avLst/>
+          </a:prstGeom>
+          <a:noFill/>
+        </p:spPr>
+        <p:txBody>
+          <a:bodyPr wrap="square">
+            <a:spAutoFit/>
+          </a:bodyPr>
+          <a:lstStyle/>
+          <a:p>
+            <a:r>
+              <a:rPr sz="900" b="0">
+                <a:solidFill>
+                  <a:srgbClr val="7A8698"/>
+                </a:solidFill>
+                <a:latin typeface="微软雅黑"/>
+              </a:rPr>
+              <a:t>截图内容逐字取自 工具/ppt97/evidence/m41_fault_text_clf/（capture97.py 真跑捕获，未改写数字）</a:t>
+            </a:r>
+          </a:p>
+        </p:txBody>
+      </p:sp>
+    </p:spTree>
+  </p:cSld>
+  <p:clrMapOvr>
+    <a:masterClrMapping/>
+  </p:clrMapOvr>
+</p:sld>
+</file>
+
+<file path=ppt/slides/slide74.xml><?xml version="1.0" encoding="utf-8"?>
+<p:sld xmlns:a="http://schemas.openxmlformats.org/drawingml/2006/main" xmlns:p="http://schemas.openxmlformats.org/presentationml/2006/main" xmlns:r="http://schemas.openxmlformats.org/officeDocument/2006/relationships">
+  <p:cSld>
+    <p:spTree>
+      <p:nvGrpSpPr>
+        <p:cNvPr id="1" name=""/>
+        <p:cNvGrpSpPr/>
+        <p:nvPr/>
+      </p:nvGrpSpPr>
+      <p:grpSpPr/>
+      <p:sp>
+        <p:nvSpPr>
+          <p:cNvPr id="2" name="Rectangle 1"/>
+          <p:cNvSpPr/>
+          <p:nvPr/>
+        </p:nvSpPr>
+        <p:spPr>
+          <a:xfrm>
+            <a:off x="0" y="0"/>
+            <a:ext cx="12192000" cy="1150000"/>
+          </a:xfrm>
+          <a:prstGeom prst="rect">
+            <a:avLst/>
+          </a:prstGeom>
+          <a:solidFill>
+            <a:srgbClr val="010328"/>
+          </a:solidFill>
+          <a:ln>
+            <a:noFill/>
+          </a:ln>
+          <a:effectLst/>
+        </p:spPr>
+        <p:style>
+          <a:lnRef idx="1">
+            <a:schemeClr val="accent1"/>
+          </a:lnRef>
+          <a:fillRef idx="3">
+            <a:schemeClr val="accent1"/>
+          </a:fillRef>
+          <a:effectRef idx="2">
+            <a:schemeClr val="accent1"/>
+          </a:effectRef>
+          <a:fontRef idx="minor">
+            <a:schemeClr val="lt1"/>
+          </a:fontRef>
+        </p:style>
+        <p:txBody>
+          <a:bodyPr rtlCol="0" anchor="ctr"/>
+          <a:lstStyle/>
+          <a:p>
+            <a:pPr algn="ctr"/>
+          </a:p>
+        </p:txBody>
+      </p:sp>
+      <p:sp>
+        <p:nvSpPr>
+          <p:cNvPr id="3" name="Rectangle 2"/>
+          <p:cNvSpPr/>
+          <p:nvPr/>
+        </p:nvSpPr>
+        <p:spPr>
+          <a:xfrm>
+            <a:off x="0" y="1150000"/>
+            <a:ext cx="2600000" cy="70000"/>
+          </a:xfrm>
+          <a:prstGeom prst="rect">
+            <a:avLst/>
+          </a:prstGeom>
+          <a:solidFill>
+            <a:srgbClr val="F5670F"/>
+          </a:solidFill>
+          <a:ln>
+            <a:noFill/>
+          </a:ln>
+          <a:effectLst/>
+        </p:spPr>
+        <p:style>
+          <a:lnRef idx="1">
+            <a:schemeClr val="accent1"/>
+          </a:lnRef>
+          <a:fillRef idx="3">
+            <a:schemeClr val="accent1"/>
+          </a:fillRef>
+          <a:effectRef idx="2">
+            <a:schemeClr val="accent1"/>
+          </a:effectRef>
+          <a:fontRef idx="minor">
+            <a:schemeClr val="lt1"/>
+          </a:fontRef>
+        </p:style>
+        <p:txBody>
+          <a:bodyPr rtlCol="0" anchor="ctr"/>
+          <a:lstStyle/>
+          <a:p>
+            <a:pPr algn="ctr"/>
+          </a:p>
+        </p:txBody>
+      </p:sp>
+      <p:sp>
+        <p:nvSpPr>
+          <p:cNvPr id="4" name="TextBox 3"/>
+          <p:cNvSpPr txBox="1"/>
+          <p:nvPr/>
+        </p:nvSpPr>
+        <p:spPr>
+          <a:xfrm>
+            <a:off x="700000" y="300000"/>
+            <a:ext cx="10792000" cy="700000"/>
+          </a:xfrm>
+          <a:prstGeom prst="rect">
+            <a:avLst/>
+          </a:prstGeom>
+          <a:noFill/>
+        </p:spPr>
+        <p:txBody>
+          <a:bodyPr wrap="square" anchor="t">
+            <a:spAutoFit/>
+          </a:bodyPr>
+          <a:lstStyle/>
+          <a:p>
+            <a:pPr algn="l">
+              <a:lnSpc>
+                <a:spcPct val="110000"/>
+              </a:lnSpc>
+              <a:spcAft>
+                <a:spcPts val="600"/>
+              </a:spcAft>
+            </a:pPr>
+            <a:r>
+              <a:rPr sz="2400" b="1">
+                <a:solidFill>
+                  <a:srgbClr val="FFFFFF"/>
+                </a:solidFill>
+                <a:latin typeface="微软雅黑"/>
+              </a:rPr>
+              <a:t>产出图证据 · m41_fault_text_clf</a:t>
+            </a:r>
+          </a:p>
+        </p:txBody>
+      </p:sp>
+      <p:sp>
+        <p:nvSpPr>
+          <p:cNvPr id="13" name="Rectangle 12"/>
+          <p:cNvSpPr/>
+          <p:nvPr/>
+        </p:nvSpPr>
+        <p:spPr>
+          <a:xfrm>
+            <a:off x="500000" y="6500000"/>
+            <a:ext cx="11100000" cy="20000"/>
+          </a:xfrm>
+          <a:prstGeom prst="rect">
+            <a:avLst/>
+          </a:prstGeom>
+          <a:solidFill>
+            <a:srgbClr val="C9D4EE"/>
+          </a:solidFill>
+          <a:ln>
+            <a:noFill/>
+          </a:ln>
+          <a:effectLst/>
+        </p:spPr>
+        <p:style>
+          <a:lnRef idx="1">
+            <a:schemeClr val="accent1"/>
+          </a:lnRef>
+          <a:fillRef idx="3">
+            <a:schemeClr val="accent1"/>
+          </a:fillRef>
+          <a:effectRef idx="2">
+            <a:schemeClr val="accent1"/>
+          </a:effectRef>
+          <a:fontRef idx="minor">
+            <a:schemeClr val="lt1"/>
+          </a:fontRef>
+        </p:style>
+        <p:txBody>
+          <a:bodyPr rtlCol="0" anchor="ctr"/>
+          <a:lstStyle/>
+          <a:p>
+            <a:pPr algn="ctr"/>
+          </a:p>
+        </p:txBody>
+      </p:sp>
+      <p:sp>
+        <p:nvSpPr>
+          <p:cNvPr id="14" name="TextBox 13"/>
+          <p:cNvSpPr txBox="1"/>
+          <p:nvPr/>
+        </p:nvSpPr>
+        <p:spPr>
+          <a:xfrm>
+            <a:off x="500000" y="6540000"/>
+            <a:ext cx="7000000" cy="300000"/>
+          </a:xfrm>
+          <a:prstGeom prst="rect">
+            <a:avLst/>
+          </a:prstGeom>
+          <a:noFill/>
+        </p:spPr>
+        <p:txBody>
+          <a:bodyPr wrap="square" anchor="t">
+            <a:spAutoFit/>
+          </a:bodyPr>
+          <a:lstStyle/>
+          <a:p>
+            <a:pPr algn="l">
+              <a:lnSpc>
+                <a:spcPct val="110000"/>
+              </a:lnSpc>
+              <a:spcAft>
+                <a:spcPts val="600"/>
+              </a:spcAft>
+            </a:pPr>
+            <a:r>
+              <a:rPr sz="1000" b="0">
+                <a:solidFill>
+                  <a:srgbClr val="8A97B5"/>
+                </a:solidFill>
+                <a:latin typeface="微软雅黑"/>
+              </a:rPr>
+              <a:t>两江智造集团 · AI应用基础</a:t>
+            </a:r>
+          </a:p>
+        </p:txBody>
+      </p:sp>
+      <p:sp>
+        <p:nvSpPr>
+          <p:cNvPr id="15" name="TextBox 14"/>
+          <p:cNvSpPr txBox="1"/>
+          <p:nvPr/>
+        </p:nvSpPr>
+        <p:spPr>
+          <a:xfrm>
+            <a:off x="10600000" y="6540000"/>
+            <a:ext cx="1000000" cy="300000"/>
+          </a:xfrm>
+          <a:prstGeom prst="rect">
+            <a:avLst/>
+          </a:prstGeom>
+          <a:noFill/>
+        </p:spPr>
+        <p:txBody>
+          <a:bodyPr wrap="square" anchor="t">
+            <a:spAutoFit/>
+          </a:bodyPr>
+          <a:lstStyle/>
+          <a:p>
+            <a:pPr algn="r">
+              <a:lnSpc>
+                <a:spcPct val="110000"/>
+              </a:lnSpc>
+              <a:spcAft>
+                <a:spcPts val="600"/>
+              </a:spcAft>
+            </a:pPr>
+            <a:r>
+              <a:rPr sz="1000" b="0">
+                <a:solidFill>
+                  <a:srgbClr val="8A97B5"/>
+                </a:solidFill>
+                <a:latin typeface="微软雅黑"/>
+              </a:rPr>
+              <a:t>36 / 74</a:t>
+            </a:r>
+          </a:p>
+        </p:txBody>
+      </p:sp>
+      <p:sp>
+        <p:nvSpPr>
+          <p:cNvPr id="16" name="Rectangle 15"/>
+          <p:cNvSpPr/>
+          <p:nvPr/>
+        </p:nvSpPr>
+        <p:spPr>
+          <a:xfrm>
+            <a:off x="457200" y="1481328"/>
+            <a:ext cx="11356848" cy="4663440"/>
+          </a:xfrm>
+          <a:prstGeom prst="rect">
+            <a:avLst/>
+          </a:prstGeom>
+          <a:solidFill>
+            <a:srgbClr val="FFFFFF"/>
+          </a:solidFill>
+          <a:ln>
+            <a:solidFill>
+              <a:srgbClr val="D6DCE4"/>
+            </a:solidFill>
+          </a:ln>
+          <a:effectLst/>
+        </p:spPr>
+        <p:style>
+          <a:lnRef idx="1">
+            <a:schemeClr val="accent1"/>
+          </a:lnRef>
+          <a:fillRef idx="3">
+            <a:schemeClr val="accent1"/>
+          </a:fillRef>
+          <a:effectRef idx="2">
+            <a:schemeClr val="accent1"/>
+          </a:effectRef>
+          <a:fontRef idx="minor">
+            <a:schemeClr val="lt1"/>
+          </a:fontRef>
+        </p:style>
+        <p:txBody>
+          <a:bodyPr rtlCol="0" anchor="ctr" wrap="square"/>
+          <a:lstStyle/>
+          <a:p>
+            <a:pPr algn="ctr"/>
+          </a:p>
+        </p:txBody>
+      </p:sp>
+      <p:sp>
+        <p:nvSpPr>
+          <p:cNvPr id="17" name="TextBox 16"/>
+          <p:cNvSpPr txBox="1"/>
+          <p:nvPr/>
+        </p:nvSpPr>
+        <p:spPr>
+          <a:xfrm>
+            <a:off x="530352" y="1517904"/>
+            <a:ext cx="11210544" cy="237744"/>
+          </a:xfrm>
+          <a:prstGeom prst="rect">
+            <a:avLst/>
+          </a:prstGeom>
+          <a:noFill/>
+        </p:spPr>
+        <p:txBody>
+          <a:bodyPr wrap="square">
+            <a:spAutoFit/>
+          </a:bodyPr>
+          <a:lstStyle/>
+          <a:p>
+            <a:r>
+              <a:rPr sz="950" b="1">
+                <a:solidFill>
+                  <a:srgbClr val="010328"/>
+                </a:solidFill>
+                <a:latin typeface="微软雅黑"/>
+              </a:rPr>
+              <a:t>产出图 · confusion_matrix.png</a:t>
+            </a:r>
+          </a:p>
+        </p:txBody>
+      </p:sp>
+      <p:sp>
+        <p:nvSpPr>
+          <p:cNvPr id="18" name="TextBox 17"/>
+          <p:cNvSpPr txBox="1"/>
+          <p:nvPr/>
+        </p:nvSpPr>
+        <p:spPr>
+          <a:xfrm>
+            <a:off x="530352" y="1755648"/>
+            <a:ext cx="11210544" cy="201168"/>
+          </a:xfrm>
+          <a:prstGeom prst="rect">
+            <a:avLst/>
+          </a:prstGeom>
+          <a:noFill/>
+        </p:spPr>
+        <p:txBody>
+          <a:bodyPr wrap="square">
+            <a:spAutoFit/>
+          </a:bodyPr>
+          <a:lstStyle/>
+          <a:p>
+            <a:r>
+              <a:rPr sz="850" b="0">
+                <a:solidFill>
+                  <a:srgbClr val="7A8698"/>
+                </a:solidFill>
+                <a:latin typeface="微软雅黑"/>
+              </a:rPr>
+              <a:t>output/confusion_matrix.png ｜ 35 KB ｜ run.py 本次落盘</a:t>
+            </a:r>
+          </a:p>
+        </p:txBody>
+      </p:sp>
+      <p:pic>
+        <p:nvPicPr>
+          <p:cNvPr id="19" name="Picture 18" descr="confusion_matrix.png"/>
+          <p:cNvPicPr>
+            <a:picLocks noChangeAspect="1"/>
+          </p:cNvPicPr>
+          <p:nvPr/>
+        </p:nvPicPr>
+        <p:blipFill>
+          <a:blip r:embed="rId2"/>
+          <a:stretch>
+            <a:fillRect/>
+          </a:stretch>
+        </p:blipFill>
+        <p:spPr>
+          <a:xfrm>
+            <a:off x="3725764" y="1993392"/>
+            <a:ext cx="4819719" cy="4078224"/>
+          </a:xfrm>
+          <a:prstGeom prst="rect">
+            <a:avLst/>
+          </a:prstGeom>
+        </p:spPr>
+      </p:pic>
+      <p:sp>
+        <p:nvSpPr>
+          <p:cNvPr id="20" name="TextBox 19"/>
+          <p:cNvSpPr txBox="1"/>
+          <p:nvPr/>
+        </p:nvSpPr>
+        <p:spPr>
+          <a:xfrm>
+            <a:off x="457200" y="6254496"/>
+            <a:ext cx="11247120" cy="201168"/>
+          </a:xfrm>
+          <a:prstGeom prst="rect">
+            <a:avLst/>
+          </a:prstGeom>
+          <a:noFill/>
+        </p:spPr>
+        <p:txBody>
+          <a:bodyPr wrap="square">
+            <a:spAutoFit/>
+          </a:bodyPr>
+          <a:lstStyle/>
+          <a:p>
+            <a:r>
+              <a:rPr sz="900" b="0">
+                <a:solidFill>
+                  <a:srgbClr val="7A8698"/>
+                </a:solidFill>
+                <a:latin typeface="微软雅黑"/>
+              </a:rPr>
+              <a:t>以上图像由 run.py 本次运行落盘到 output/，非外部素材。</a:t>
+            </a:r>
+          </a:p>
+        </p:txBody>
+      </p:sp>
+    </p:spTree>
+  </p:cSld>
+  <p:clrMapOvr>
+    <a:masterClrMapping/>
+  </p:clrMapOvr>
+</p:sld>
+</file>
+
 <file path=ppt/slides/slide8.xml><?xml version="1.0" encoding="utf-8"?>
 <p:sld xmlns:a="http://schemas.openxmlformats.org/drawingml/2006/main" xmlns:p="http://schemas.openxmlformats.org/presentationml/2006/main" xmlns:r="http://schemas.openxmlformats.org/officeDocument/2006/relationships">
   <p:cSld>
@@ -68716,7 +71174,7 @@
                 </a:solidFill>
                 <a:latin typeface="微软雅黑"/>
               </a:rPr>
-              <a:t>8 / 71</a:t>
+              <a:t>8 / 74</a:t>
             </a:r>
           </a:p>
         </p:txBody>
@@ -69688,7 +72146,7 @@
                 </a:solidFill>
                 <a:latin typeface="微软雅黑"/>
               </a:rPr>
-              <a:t>9 / 71</a:t>
+              <a:t>9 / 74</a:t>
             </a:r>
           </a:p>
         </p:txBody>
